--- a/pptx-creation-plugin/examples/financial-analysis/out/deck.pptx
+++ b/pptx-creation-plugin/examples/financial-analysis/out/deck.pptx
@@ -150,7 +150,7 @@
           </c:spPr>
           <c:invertIfNegative val="0"/>
           <c:dLbls>
-            <c:numFmt formatCode="#,##0.0" sourceLinked="0"/>
+            <c:numFmt formatCode="#,##0.0;▲#,##0.0" sourceLinked="0"/>
             <c:txPr>
               <a:bodyPr/>
               <a:lstStyle/>
@@ -160,7 +160,7 @@
                     <a:solidFill>
                       <a:srgbClr val="1B2735"/>
                     </a:solidFill>
-                    <a:latin typeface="Meiryo"/>
+                    <a:latin typeface="Yu Gothic Medium"/>
                   </a:defRPr>
                 </a:pPr>
               </a:p>
@@ -218,7 +218,7 @@
           </c:val>
         </c:ser>
         <c:dLbls>
-          <c:numFmt formatCode="#,##0.0" sourceLinked="0"/>
+          <c:numFmt formatCode="#,##0.0;▲#,##0.0" sourceLinked="0"/>
           <c:txPr>
             <a:bodyPr/>
             <a:lstStyle/>
@@ -228,7 +228,7 @@
                   <a:solidFill>
                     <a:srgbClr val="1B2735"/>
                   </a:solidFill>
-                  <a:latin typeface="Meiryo"/>
+                  <a:latin typeface="Yu Gothic Medium"/>
                 </a:defRPr>
               </a:pPr>
             </a:p>
@@ -274,7 +274,7 @@
                 <a:solidFill>
                   <a:srgbClr val="566373"/>
                 </a:solidFill>
-                <a:latin typeface="Meiryo"/>
+                <a:latin typeface="Yu Gothic Medium"/>
               </a:defRPr>
             </a:pPr>
             <a:endParaRPr lang="en-US"/>
@@ -1939,7 +1939,7 @@
         </p:nvSpPr>
         <p:spPr>
           <a:xfrm>
-            <a:off x="640080" y="1467612"/>
+            <a:off x="685800" y="1467612"/>
             <a:ext cx="118872" cy="118872"/>
           </a:xfrm>
           <a:prstGeom prst="ellipse">
@@ -1959,7 +1959,7 @@
         </p:nvSpPr>
         <p:spPr>
           <a:xfrm>
-            <a:off x="877824" y="1417320"/>
+            <a:off x="923544" y="1417320"/>
             <a:ext cx="7315200" cy="274320"/>
           </a:xfrm>
           <a:prstGeom prst="rect">
@@ -1976,17 +1976,17 @@
               <a:buNone/>
             </a:pPr>
             <a:r>
-              <a:rPr lang="en-US" sz="1250" b="1" spc="100" kern="0" dirty="0">
+              <a:rPr lang="en-US" sz="1200" b="1" spc="150" kern="0" dirty="0">
                 <a:solidFill>
                   <a:srgbClr val="5FA8AE"/>
                 </a:solidFill>
-                <a:latin typeface="Meiryo" pitchFamily="34" charset="0"/>
-                <a:ea typeface="Meiryo" pitchFamily="34" charset="-122"/>
-                <a:cs typeface="Meiryo" pitchFamily="34" charset="-120"/>
+                <a:latin typeface="Yu Gothic" pitchFamily="34" charset="0"/>
+                <a:ea typeface="Yu Gothic" pitchFamily="34" charset="-122"/>
+                <a:cs typeface="Yu Gothic" pitchFamily="34" charset="-120"/>
               </a:rPr>
               <a:t>取締役会資料（社内）</a:t>
             </a:r>
-            <a:endParaRPr lang="en-US" sz="1250" dirty="0"/>
+            <a:endParaRPr lang="en-US" sz="1200" dirty="0"/>
           </a:p>
         </p:txBody>
       </p:sp>
@@ -1998,8 +1998,8 @@
         </p:nvSpPr>
         <p:spPr>
           <a:xfrm>
-            <a:off x="640080" y="2057400"/>
-            <a:ext cx="9144000" cy="1371600"/>
+            <a:off x="685800" y="2011680"/>
+            <a:ext cx="9144000" cy="1408176"/>
           </a:xfrm>
           <a:prstGeom prst="rect">
             <a:avLst/>
@@ -2013,42 +2013,42 @@
           <a:p>
             <a:pPr algn="l" indent="0" marL="0">
               <a:lnSpc>
-                <a:spcPct val="112000"/>
+                <a:spcPct val="108000"/>
               </a:lnSpc>
               <a:buNone/>
             </a:pPr>
             <a:r>
-              <a:rPr lang="en-US" sz="4000" b="1" dirty="0">
+              <a:rPr lang="en-US" sz="4400" b="1" spc="-20" kern="0" dirty="0">
                 <a:solidFill>
                   <a:srgbClr val="FFFFFF"/>
                 </a:solidFill>
-                <a:latin typeface="Meiryo" pitchFamily="34" charset="0"/>
-                <a:ea typeface="Meiryo" pitchFamily="34" charset="-122"/>
-                <a:cs typeface="Meiryo" pitchFamily="34" charset="-120"/>
+                <a:latin typeface="Yu Gothic" pitchFamily="34" charset="0"/>
+                <a:ea typeface="Yu Gothic" pitchFamily="34" charset="-122"/>
+                <a:cs typeface="Yu Gothic" pitchFamily="34" charset="-120"/>
               </a:rPr>
               <a:t>FY2026 上期</a:t>
             </a:r>
-            <a:endParaRPr lang="en-US" sz="4000" dirty="0"/>
+            <a:endParaRPr lang="en-US" sz="4400" dirty="0"/>
           </a:p>
           <a:p>
             <a:pPr algn="l" indent="0" marL="0">
               <a:lnSpc>
-                <a:spcPct val="112000"/>
+                <a:spcPct val="108000"/>
               </a:lnSpc>
               <a:buNone/>
             </a:pPr>
             <a:r>
-              <a:rPr lang="en-US" sz="4000" b="1" dirty="0">
+              <a:rPr lang="en-US" sz="4400" b="1" spc="-20" kern="0" dirty="0">
                 <a:solidFill>
                   <a:srgbClr val="FFFFFF"/>
                 </a:solidFill>
-                <a:latin typeface="Meiryo" pitchFamily="34" charset="0"/>
-                <a:ea typeface="Meiryo" pitchFamily="34" charset="-122"/>
-                <a:cs typeface="Meiryo" pitchFamily="34" charset="-120"/>
+                <a:latin typeface="Yu Gothic" pitchFamily="34" charset="0"/>
+                <a:ea typeface="Yu Gothic" pitchFamily="34" charset="-122"/>
+                <a:cs typeface="Yu Gothic" pitchFamily="34" charset="-120"/>
               </a:rPr>
               <a:t>経営レビュー</a:t>
             </a:r>
-            <a:endParaRPr lang="en-US" sz="4000" dirty="0"/>
+            <a:endParaRPr lang="en-US" sz="4400" dirty="0"/>
           </a:p>
         </p:txBody>
       </p:sp>
@@ -2060,8 +2060,8 @@
         </p:nvSpPr>
         <p:spPr>
           <a:xfrm>
-            <a:off x="640080" y="4160520"/>
-            <a:ext cx="8686800" cy="457200"/>
+            <a:off x="685800" y="4297680"/>
+            <a:ext cx="8686800" cy="822960"/>
           </a:xfrm>
           <a:prstGeom prst="rect">
             <a:avLst/>
@@ -2071,58 +2071,61 @@
         </p:spPr>
         <p:txBody>
           <a:bodyPr wrap="square" lIns="0" tIns="0" rIns="0" bIns="0" rtlCol="0" anchor="t"/>
+          <a:lstStyle/>
+          <a:p>
+            <a:pPr algn="l" indent="0" marL="0">
+              <a:lnSpc>
+                <a:spcPct val="150000"/>
+              </a:lnSpc>
+              <a:buNone/>
+            </a:pPr>
+            <a:r>
+              <a:rPr lang="en-US" sz="1700" dirty="0">
+                <a:solidFill>
+                  <a:srgbClr val="AAB8C7"/>
+                </a:solidFill>
+                <a:latin typeface="Yu Gothic Medium" pitchFamily="34" charset="0"/>
+                <a:ea typeface="Yu Gothic Medium" pitchFamily="34" charset="-122"/>
+                <a:cs typeface="Yu Gothic Medium" pitchFamily="34" charset="-120"/>
+              </a:rPr>
+              <a:t>業績の振り返りと、下期の打ち手</a:t>
+            </a:r>
+            <a:endParaRPr lang="en-US" sz="1700" dirty="0"/>
+          </a:p>
+        </p:txBody>
+      </p:sp>
+      <p:sp>
+        <p:nvSpPr>
+          <p:cNvPr id="7" name="Text 5"/>
+          <p:cNvSpPr/>
+          <p:nvPr/>
+        </p:nvSpPr>
+        <p:spPr>
+          <a:xfrm>
+            <a:off x="685800" y="6080760"/>
+            <a:ext cx="8229600" cy="320040"/>
+          </a:xfrm>
+          <a:prstGeom prst="rect">
+            <a:avLst/>
+          </a:prstGeom>
+          <a:noFill/>
+          <a:ln/>
+        </p:spPr>
+        <p:txBody>
+          <a:bodyPr wrap="square" lIns="0" tIns="0" rIns="0" bIns="0" rtlCol="0" anchor="ctr"/>
           <a:lstStyle/>
           <a:p>
             <a:pPr algn="l" indent="0" marL="0">
               <a:buNone/>
             </a:pPr>
             <a:r>
-              <a:rPr lang="en-US" sz="1700" dirty="0">
+              <a:rPr lang="en-US" sz="1250" dirty="0">
                 <a:solidFill>
                   <a:srgbClr val="AAB8C7"/>
                 </a:solidFill>
-                <a:latin typeface="Meiryo" pitchFamily="34" charset="0"/>
-                <a:ea typeface="Meiryo" pitchFamily="34" charset="-122"/>
-                <a:cs typeface="Meiryo" pitchFamily="34" charset="-120"/>
-              </a:rPr>
-              <a:t>業績の振り返りと、下期の打ち手</a:t>
-            </a:r>
-            <a:endParaRPr lang="en-US" sz="1700" dirty="0"/>
-          </a:p>
-        </p:txBody>
-      </p:sp>
-      <p:sp>
-        <p:nvSpPr>
-          <p:cNvPr id="7" name="Text 5"/>
-          <p:cNvSpPr/>
-          <p:nvPr/>
-        </p:nvSpPr>
-        <p:spPr>
-          <a:xfrm>
-            <a:off x="640080" y="6080760"/>
-            <a:ext cx="8229600" cy="320040"/>
-          </a:xfrm>
-          <a:prstGeom prst="rect">
-            <a:avLst/>
-          </a:prstGeom>
-          <a:noFill/>
-          <a:ln/>
-        </p:spPr>
-        <p:txBody>
-          <a:bodyPr wrap="square" lIns="0" tIns="0" rIns="0" bIns="0" rtlCol="0" anchor="ctr"/>
-          <a:lstStyle/>
-          <a:p>
-            <a:pPr algn="l" indent="0" marL="0">
-              <a:buNone/>
-            </a:pPr>
-            <a:r>
-              <a:rPr lang="en-US" sz="1250" dirty="0">
-                <a:solidFill>
-                  <a:srgbClr val="AAB8C7"/>
-                </a:solidFill>
-                <a:latin typeface="Meiryo" pitchFamily="34" charset="0"/>
-                <a:ea typeface="Meiryo" pitchFamily="34" charset="-122"/>
-                <a:cs typeface="Meiryo" pitchFamily="34" charset="-120"/>
+                <a:latin typeface="Yu Gothic" pitchFamily="34" charset="0"/>
+                <a:ea typeface="Yu Gothic" pitchFamily="34" charset="-122"/>
+                <a:cs typeface="Yu Gothic" pitchFamily="34" charset="-120"/>
               </a:rPr>
               <a:t>サンプル製造株式会社　｜　経営企画部　｜　2026年7月</a:t>
             </a:r>
@@ -2190,7 +2193,7 @@
         </p:nvSpPr>
         <p:spPr>
           <a:xfrm>
-            <a:off x="640080" y="1421892"/>
+            <a:off x="685800" y="1421892"/>
             <a:ext cx="118872" cy="118872"/>
           </a:xfrm>
           <a:prstGeom prst="ellipse">
@@ -2210,7 +2213,7 @@
         </p:nvSpPr>
         <p:spPr>
           <a:xfrm>
-            <a:off x="877824" y="1371600"/>
+            <a:off x="923544" y="1371600"/>
             <a:ext cx="7315200" cy="274320"/>
           </a:xfrm>
           <a:prstGeom prst="rect">
@@ -2227,17 +2230,17 @@
               <a:buNone/>
             </a:pPr>
             <a:r>
-              <a:rPr lang="en-US" sz="1250" b="1" spc="100" kern="0" dirty="0">
+              <a:rPr lang="en-US" sz="1200" b="1" spc="150" kern="0" dirty="0">
                 <a:solidFill>
                   <a:srgbClr val="5FA8AE"/>
                 </a:solidFill>
-                <a:latin typeface="Meiryo" pitchFamily="34" charset="0"/>
-                <a:ea typeface="Meiryo" pitchFamily="34" charset="-122"/>
-                <a:cs typeface="Meiryo" pitchFamily="34" charset="-120"/>
+                <a:latin typeface="Yu Gothic" pitchFamily="34" charset="0"/>
+                <a:ea typeface="Yu Gothic" pitchFamily="34" charset="-122"/>
+                <a:cs typeface="Yu Gothic" pitchFamily="34" charset="-120"/>
               </a:rPr>
               <a:t>次のアクション</a:t>
             </a:r>
-            <a:endParaRPr lang="en-US" sz="1250" dirty="0"/>
+            <a:endParaRPr lang="en-US" sz="1200" dirty="0"/>
           </a:p>
         </p:txBody>
       </p:sp>
@@ -2249,8 +2252,8 @@
         </p:nvSpPr>
         <p:spPr>
           <a:xfrm>
-            <a:off x="640080" y="1965960"/>
-            <a:ext cx="10058400" cy="1371600"/>
+            <a:off x="685800" y="1965960"/>
+            <a:ext cx="10058400" cy="1408176"/>
           </a:xfrm>
           <a:prstGeom prst="rect">
             <a:avLst/>
@@ -2264,18 +2267,18 @@
           <a:p>
             <a:pPr algn="l" indent="0" marL="0">
               <a:lnSpc>
-                <a:spcPct val="112000"/>
+                <a:spcPct val="108000"/>
               </a:lnSpc>
               <a:buNone/>
             </a:pPr>
             <a:r>
-              <a:rPr lang="en-US" sz="3200" b="1" dirty="0">
+              <a:rPr lang="en-US" sz="3200" b="1" spc="-20" kern="0" dirty="0">
                 <a:solidFill>
                   <a:srgbClr val="FFFFFF"/>
                 </a:solidFill>
-                <a:latin typeface="Meiryo" pitchFamily="34" charset="0"/>
-                <a:ea typeface="Meiryo" pitchFamily="34" charset="-122"/>
-                <a:cs typeface="Meiryo" pitchFamily="34" charset="-120"/>
+                <a:latin typeface="Yu Gothic" pitchFamily="34" charset="0"/>
+                <a:ea typeface="Yu Gothic" pitchFamily="34" charset="-122"/>
+                <a:cs typeface="Yu Gothic" pitchFamily="34" charset="-120"/>
               </a:rPr>
               <a:t>下期計画の承認を</a:t>
             </a:r>
@@ -2284,18 +2287,18 @@
           <a:p>
             <a:pPr algn="l" indent="0" marL="0">
               <a:lnSpc>
-                <a:spcPct val="112000"/>
+                <a:spcPct val="108000"/>
               </a:lnSpc>
               <a:buNone/>
             </a:pPr>
             <a:r>
-              <a:rPr lang="en-US" sz="3200" b="1" dirty="0">
+              <a:rPr lang="en-US" sz="3200" b="1" spc="-20" kern="0" dirty="0">
                 <a:solidFill>
                   <a:srgbClr val="FFFFFF"/>
                 </a:solidFill>
-                <a:latin typeface="Meiryo" pitchFamily="34" charset="0"/>
-                <a:ea typeface="Meiryo" pitchFamily="34" charset="-122"/>
-                <a:cs typeface="Meiryo" pitchFamily="34" charset="-120"/>
+                <a:latin typeface="Yu Gothic" pitchFamily="34" charset="0"/>
+                <a:ea typeface="Yu Gothic" pitchFamily="34" charset="-122"/>
+                <a:cs typeface="Yu Gothic" pitchFamily="34" charset="-120"/>
               </a:rPr>
               <a:t>お願いします</a:t>
             </a:r>
@@ -2311,7 +2314,7 @@
         </p:nvSpPr>
         <p:spPr>
           <a:xfrm>
-            <a:off x="640080" y="3886200"/>
+            <a:off x="685800" y="3886200"/>
             <a:ext cx="7955280" cy="1691640"/>
           </a:xfrm>
           <a:prstGeom prst="roundRect">
@@ -2326,7 +2329,7 @@
           <a:effectLst>
             <a:outerShdw sx="100000" sy="100000" kx="0" ky="0" algn="bl" rotWithShape="0" blurRad="127000" dist="50800" dir="5400000">
               <a:srgbClr val="1B2735">
-                <a:alpha val="12000"/>
+                <a:alpha val="10000"/>
               </a:srgbClr>
             </a:outerShdw>
           </a:effectLst>
@@ -2340,7 +2343,7 @@
         </p:nvSpPr>
         <p:spPr>
           <a:xfrm>
-            <a:off x="1097280" y="4178808"/>
+            <a:off x="1143000" y="4197096"/>
             <a:ext cx="7040880" cy="457200"/>
           </a:xfrm>
           <a:prstGeom prst="rect">
@@ -2361,9 +2364,9 @@
                 <a:solidFill>
                   <a:srgbClr val="FFFFFF"/>
                 </a:solidFill>
-                <a:latin typeface="Meiryo" pitchFamily="34" charset="0"/>
-                <a:ea typeface="Meiryo" pitchFamily="34" charset="-122"/>
-                <a:cs typeface="Meiryo" pitchFamily="34" charset="-120"/>
+                <a:latin typeface="Yu Gothic" pitchFamily="34" charset="0"/>
+                <a:ea typeface="Yu Gothic" pitchFamily="34" charset="-122"/>
+                <a:cs typeface="Yu Gothic" pitchFamily="34" charset="-120"/>
               </a:rPr>
               <a:t>本日ご決定いただきたい事項</a:t>
             </a:r>
@@ -2379,7 +2382,7 @@
         </p:nvSpPr>
         <p:spPr>
           <a:xfrm>
-            <a:off x="1097280" y="4727448"/>
+            <a:off x="1143000" y="4754880"/>
             <a:ext cx="7040880" cy="685800"/>
           </a:xfrm>
           <a:prstGeom prst="rect">
@@ -2394,22 +2397,22 @@
           <a:p>
             <a:pPr algn="l" indent="0" marL="0">
               <a:lnSpc>
-                <a:spcPct val="135000"/>
+                <a:spcPct val="140000"/>
               </a:lnSpc>
               <a:buNone/>
             </a:pPr>
             <a:r>
-              <a:rPr lang="en-US" sz="1300" dirty="0">
+              <a:rPr lang="en-US" sz="1350" dirty="0">
                 <a:solidFill>
                   <a:srgbClr val="EAF7F7"/>
                 </a:solidFill>
-                <a:latin typeface="Meiryo" pitchFamily="34" charset="0"/>
-                <a:ea typeface="Meiryo" pitchFamily="34" charset="-122"/>
-                <a:cs typeface="Meiryo" pitchFamily="34" charset="-120"/>
+                <a:latin typeface="Yu Gothic Medium" pitchFamily="34" charset="0"/>
+                <a:ea typeface="Yu Gothic Medium" pitchFamily="34" charset="-122"/>
+                <a:cs typeface="Yu Gothic Medium" pitchFamily="34" charset="-120"/>
               </a:rPr>
               <a:t>① 下期の価格改定方針　② 調達改革の予算枠　③ 採用計画の見直し。詳細は別紙「下期予算案」をご参照ください。</a:t>
             </a:r>
-            <a:endParaRPr lang="en-US" sz="1300" dirty="0"/>
+            <a:endParaRPr lang="en-US" sz="1350" dirty="0"/>
           </a:p>
         </p:txBody>
       </p:sp>
@@ -2421,7 +2424,7 @@
         </p:nvSpPr>
         <p:spPr>
           <a:xfrm>
-            <a:off x="640080" y="6144768"/>
+            <a:off x="685800" y="6144768"/>
             <a:ext cx="10515600" cy="320040"/>
           </a:xfrm>
           <a:prstGeom prst="rect">
@@ -2442,9 +2445,9 @@
                 <a:solidFill>
                   <a:srgbClr val="AAB8C7"/>
                 </a:solidFill>
-                <a:latin typeface="Meiryo" pitchFamily="34" charset="0"/>
-                <a:ea typeface="Meiryo" pitchFamily="34" charset="-122"/>
-                <a:cs typeface="Meiryo" pitchFamily="34" charset="-120"/>
+                <a:latin typeface="Yu Gothic" pitchFamily="34" charset="0"/>
+                <a:ea typeface="Yu Gothic" pitchFamily="34" charset="-122"/>
+                <a:cs typeface="Yu Gothic" pitchFamily="34" charset="-120"/>
               </a:rPr>
               <a:t>資料作成：経営企画部 ／ 問い合わせ：keiei@example.co.jp</a:t>
             </a:r>
@@ -2492,7 +2495,7 @@
         </p:nvSpPr>
         <p:spPr>
           <a:xfrm>
-            <a:off x="640080" y="690372"/>
+            <a:off x="685800" y="736092"/>
             <a:ext cx="118872" cy="118872"/>
           </a:xfrm>
           <a:prstGeom prst="ellipse">
@@ -2512,7 +2515,7 @@
         </p:nvSpPr>
         <p:spPr>
           <a:xfrm>
-            <a:off x="877824" y="640080"/>
+            <a:off x="923544" y="685800"/>
             <a:ext cx="7315200" cy="274320"/>
           </a:xfrm>
           <a:prstGeom prst="rect">
@@ -2529,17 +2532,17 @@
               <a:buNone/>
             </a:pPr>
             <a:r>
-              <a:rPr lang="en-US" sz="1250" b="1" spc="100" kern="0" dirty="0">
+              <a:rPr lang="en-US" sz="1200" b="1" spc="150" kern="0" dirty="0">
                 <a:solidFill>
                   <a:srgbClr val="0E7C86"/>
                 </a:solidFill>
-                <a:latin typeface="Meiryo" pitchFamily="34" charset="0"/>
-                <a:ea typeface="Meiryo" pitchFamily="34" charset="-122"/>
-                <a:cs typeface="Meiryo" pitchFamily="34" charset="-120"/>
+                <a:latin typeface="Yu Gothic" pitchFamily="34" charset="0"/>
+                <a:ea typeface="Yu Gothic" pitchFamily="34" charset="-122"/>
+                <a:cs typeface="Yu Gothic" pitchFamily="34" charset="-120"/>
               </a:rPr>
               <a:t>上期サマリー</a:t>
             </a:r>
-            <a:endParaRPr lang="en-US" sz="1250" dirty="0"/>
+            <a:endParaRPr lang="en-US" sz="1200" dirty="0"/>
           </a:p>
         </p:txBody>
       </p:sp>
@@ -2551,7 +2554,7 @@
         </p:nvSpPr>
         <p:spPr>
           <a:xfrm>
-            <a:off x="914400" y="1783080"/>
+            <a:off x="914400" y="1828800"/>
             <a:ext cx="10362895" cy="1554480"/>
           </a:xfrm>
           <a:prstGeom prst="rect">
@@ -2566,18 +2569,18 @@
           <a:p>
             <a:pPr algn="ctr" indent="0" marL="0">
               <a:lnSpc>
-                <a:spcPct val="116000"/>
+                <a:spcPct val="118000"/>
               </a:lnSpc>
               <a:buNone/>
             </a:pPr>
             <a:r>
-              <a:rPr lang="en-US" sz="3200" b="1" dirty="0">
+              <a:rPr lang="en-US" sz="3200" b="1" spc="-20" kern="0" dirty="0">
                 <a:solidFill>
                   <a:srgbClr val="1B2735"/>
                 </a:solidFill>
-                <a:latin typeface="Meiryo" pitchFamily="34" charset="0"/>
-                <a:ea typeface="Meiryo" pitchFamily="34" charset="-122"/>
-                <a:cs typeface="Meiryo" pitchFamily="34" charset="-120"/>
+                <a:latin typeface="Yu Gothic" pitchFamily="34" charset="0"/>
+                <a:ea typeface="Yu Gothic" pitchFamily="34" charset="-122"/>
+                <a:cs typeface="Yu Gothic" pitchFamily="34" charset="-120"/>
               </a:rPr>
               <a:t>上期は増収増益。下期は、</a:t>
             </a:r>
@@ -2586,18 +2589,18 @@
           <a:p>
             <a:pPr algn="ctr" indent="0" marL="0">
               <a:lnSpc>
-                <a:spcPct val="116000"/>
+                <a:spcPct val="118000"/>
               </a:lnSpc>
               <a:buNone/>
             </a:pPr>
             <a:r>
-              <a:rPr lang="en-US" sz="3200" b="1" dirty="0">
+              <a:rPr lang="en-US" sz="3200" b="1" spc="-20" kern="0" dirty="0">
                 <a:solidFill>
                   <a:srgbClr val="1B2735"/>
                 </a:solidFill>
-                <a:latin typeface="Meiryo" pitchFamily="34" charset="0"/>
-                <a:ea typeface="Meiryo" pitchFamily="34" charset="-122"/>
-                <a:cs typeface="Meiryo" pitchFamily="34" charset="-120"/>
+                <a:latin typeface="Yu Gothic" pitchFamily="34" charset="0"/>
+                <a:ea typeface="Yu Gothic" pitchFamily="34" charset="-122"/>
+                <a:cs typeface="Yu Gothic" pitchFamily="34" charset="-120"/>
               </a:rPr>
               <a:t>原価上昇への対応が利益を左右する。</a:t>
             </a:r>
@@ -2630,17 +2633,17 @@
               <a:buNone/>
             </a:pPr>
             <a:r>
-              <a:rPr lang="en-US" sz="6200" b="1" dirty="0">
+              <a:rPr lang="en-US" sz="6400" b="1" dirty="0">
                 <a:solidFill>
                   <a:srgbClr val="0E7C86"/>
                 </a:solidFill>
-                <a:latin typeface="Meiryo" pitchFamily="34" charset="0"/>
-                <a:ea typeface="Meiryo" pitchFamily="34" charset="-122"/>
-                <a:cs typeface="Meiryo" pitchFamily="34" charset="-120"/>
+                <a:latin typeface="Yu Gothic" pitchFamily="34" charset="0"/>
+                <a:ea typeface="Yu Gothic" pitchFamily="34" charset="-122"/>
+                <a:cs typeface="Yu Gothic" pitchFamily="34" charset="-120"/>
               </a:rPr>
               <a:t>+9.3%</a:t>
             </a:r>
-            <a:endParaRPr lang="en-US" sz="6200" dirty="0"/>
+            <a:endParaRPr lang="en-US" sz="6400" dirty="0"/>
           </a:p>
         </p:txBody>
       </p:sp>
@@ -2652,7 +2655,7 @@
         </p:nvSpPr>
         <p:spPr>
           <a:xfrm>
-            <a:off x="2377440" y="4754880"/>
+            <a:off x="2377440" y="4800600"/>
             <a:ext cx="7436815" cy="731520"/>
           </a:xfrm>
           <a:prstGeom prst="rect">
@@ -2667,22 +2670,42 @@
           <a:p>
             <a:pPr algn="ctr" indent="0" marL="0">
               <a:lnSpc>
-                <a:spcPct val="125000"/>
+                <a:spcPct val="150000"/>
               </a:lnSpc>
               <a:buNone/>
             </a:pPr>
             <a:r>
-              <a:rPr lang="en-US" sz="1300" dirty="0">
+              <a:rPr lang="en-US" sz="1350" dirty="0">
                 <a:solidFill>
                   <a:srgbClr val="566373"/>
                 </a:solidFill>
-                <a:latin typeface="Meiryo" pitchFamily="34" charset="0"/>
-                <a:ea typeface="Meiryo" pitchFamily="34" charset="-122"/>
-                <a:cs typeface="Meiryo" pitchFamily="34" charset="-120"/>
-              </a:rPr>
-              <a:t>売上高 前年同期比（上期）。営業利益率は8.4%（前年同期7.0%）。※社内管理数値・速報ベース</a:t>
-            </a:r>
-            <a:endParaRPr lang="en-US" sz="1300" dirty="0"/>
+                <a:latin typeface="Yu Gothic" pitchFamily="34" charset="0"/>
+                <a:ea typeface="Yu Gothic" pitchFamily="34" charset="-122"/>
+                <a:cs typeface="Yu Gothic" pitchFamily="34" charset="-120"/>
+              </a:rPr>
+              <a:t>売上高 前年同期比（上期）。営業利益率は 8.4%</a:t>
+            </a:r>
+            <a:endParaRPr lang="en-US" sz="1350" dirty="0"/>
+          </a:p>
+          <a:p>
+            <a:pPr algn="ctr" indent="0" marL="0">
+              <a:lnSpc>
+                <a:spcPct val="150000"/>
+              </a:lnSpc>
+              <a:buNone/>
+            </a:pPr>
+            <a:r>
+              <a:rPr lang="en-US" sz="1350" dirty="0">
+                <a:solidFill>
+                  <a:srgbClr val="566373"/>
+                </a:solidFill>
+                <a:latin typeface="Yu Gothic" pitchFamily="34" charset="0"/>
+                <a:ea typeface="Yu Gothic" pitchFamily="34" charset="-122"/>
+                <a:cs typeface="Yu Gothic" pitchFamily="34" charset="-120"/>
+              </a:rPr>
+              <a:t>（前年同期 7.0%）。※社内管理数値・速報ベース</a:t>
+            </a:r>
+            <a:endParaRPr lang="en-US" sz="1350" dirty="0"/>
           </a:p>
         </p:txBody>
       </p:sp>
@@ -2694,7 +2717,7 @@
         </p:nvSpPr>
         <p:spPr>
           <a:xfrm>
-            <a:off x="640080" y="6473952"/>
+            <a:off x="685800" y="6473952"/>
             <a:ext cx="2743200" cy="274320"/>
           </a:xfrm>
           <a:prstGeom prst="rect">
@@ -2711,17 +2734,17 @@
               <a:buNone/>
             </a:pPr>
             <a:r>
-              <a:rPr lang="en-US" sz="1100" dirty="0">
+              <a:rPr lang="en-US" sz="1200" dirty="0">
                 <a:solidFill>
                   <a:srgbClr val="8A98A6"/>
                 </a:solidFill>
-                <a:latin typeface="Meiryo" pitchFamily="34" charset="0"/>
-                <a:ea typeface="Meiryo" pitchFamily="34" charset="-122"/>
-                <a:cs typeface="Meiryo" pitchFamily="34" charset="-120"/>
+                <a:latin typeface="Yu Gothic" pitchFamily="34" charset="0"/>
+                <a:ea typeface="Yu Gothic" pitchFamily="34" charset="-122"/>
+                <a:cs typeface="Yu Gothic" pitchFamily="34" charset="-120"/>
               </a:rPr>
               <a:t>サンプル製造</a:t>
             </a:r>
-            <a:endParaRPr lang="en-US" sz="1100" dirty="0"/>
+            <a:endParaRPr lang="en-US" sz="1200" dirty="0"/>
           </a:p>
         </p:txBody>
       </p:sp>
@@ -2733,7 +2756,7 @@
         </p:nvSpPr>
         <p:spPr>
           <a:xfrm>
-            <a:off x="10637215" y="6473952"/>
+            <a:off x="10591495" y="6473952"/>
             <a:ext cx="914400" cy="274320"/>
           </a:xfrm>
           <a:prstGeom prst="rect">
@@ -2750,17 +2773,17 @@
               <a:buNone/>
             </a:pPr>
             <a:r>
-              <a:rPr lang="en-US" sz="1100" dirty="0">
+              <a:rPr lang="en-US" sz="1200" dirty="0">
                 <a:solidFill>
                   <a:srgbClr val="8A98A6"/>
                 </a:solidFill>
-                <a:latin typeface="Meiryo" pitchFamily="34" charset="0"/>
-                <a:ea typeface="Meiryo" pitchFamily="34" charset="-122"/>
-                <a:cs typeface="Meiryo" pitchFamily="34" charset="-120"/>
+                <a:latin typeface="Yu Gothic" pitchFamily="34" charset="0"/>
+                <a:ea typeface="Yu Gothic" pitchFamily="34" charset="-122"/>
+                <a:cs typeface="Yu Gothic" pitchFamily="34" charset="-120"/>
               </a:rPr>
               <a:t>2</a:t>
             </a:r>
-            <a:endParaRPr lang="en-US" sz="1100" dirty="0"/>
+            <a:endParaRPr lang="en-US" sz="1200" dirty="0"/>
           </a:p>
         </p:txBody>
       </p:sp>
@@ -2805,7 +2828,7 @@
         <p:spPr>
           <a:xfrm>
             <a:off x="7680960" y="1097280"/>
-            <a:ext cx="3870655" cy="4663440"/>
+            <a:ext cx="3824935" cy="4663440"/>
           </a:xfrm>
           <a:prstGeom prst="rect">
             <a:avLst/>
@@ -2825,9 +2848,9 @@
                 <a:solidFill>
                   <a:srgbClr val="26384C"/>
                 </a:solidFill>
-                <a:latin typeface="Meiryo" pitchFamily="34" charset="0"/>
-                <a:ea typeface="Meiryo" pitchFamily="34" charset="-122"/>
-                <a:cs typeface="Meiryo" pitchFamily="34" charset="-120"/>
+                <a:latin typeface="Yu Gothic" pitchFamily="34" charset="0"/>
+                <a:ea typeface="Yu Gothic" pitchFamily="34" charset="-122"/>
+                <a:cs typeface="Yu Gothic" pitchFamily="34" charset="-120"/>
               </a:rPr>
               <a:t>01</a:t>
             </a:r>
@@ -2843,7 +2866,7 @@
         </p:nvSpPr>
         <p:spPr>
           <a:xfrm>
-            <a:off x="640080" y="2747772"/>
+            <a:off x="685800" y="2747772"/>
             <a:ext cx="118872" cy="118872"/>
           </a:xfrm>
           <a:prstGeom prst="ellipse">
@@ -2863,7 +2886,7 @@
         </p:nvSpPr>
         <p:spPr>
           <a:xfrm>
-            <a:off x="877824" y="2697480"/>
+            <a:off x="923544" y="2697480"/>
             <a:ext cx="7315200" cy="274320"/>
           </a:xfrm>
           <a:prstGeom prst="rect">
@@ -2880,17 +2903,17 @@
               <a:buNone/>
             </a:pPr>
             <a:r>
-              <a:rPr lang="en-US" sz="1250" b="1" spc="100" kern="0" dirty="0">
+              <a:rPr lang="en-US" sz="1200" b="1" spc="150" kern="0" dirty="0">
                 <a:solidFill>
                   <a:srgbClr val="5FA8AE"/>
                 </a:solidFill>
-                <a:latin typeface="Meiryo" pitchFamily="34" charset="0"/>
-                <a:ea typeface="Meiryo" pitchFamily="34" charset="-122"/>
-                <a:cs typeface="Meiryo" pitchFamily="34" charset="-120"/>
+                <a:latin typeface="Yu Gothic" pitchFamily="34" charset="0"/>
+                <a:ea typeface="Yu Gothic" pitchFamily="34" charset="-122"/>
+                <a:cs typeface="Yu Gothic" pitchFamily="34" charset="-120"/>
               </a:rPr>
               <a:t>業績レビュー</a:t>
             </a:r>
-            <a:endParaRPr lang="en-US" sz="1250" dirty="0"/>
+            <a:endParaRPr lang="en-US" sz="1200" dirty="0"/>
           </a:p>
         </p:txBody>
       </p:sp>
@@ -2902,8 +2925,8 @@
         </p:nvSpPr>
         <p:spPr>
           <a:xfrm>
-            <a:off x="640080" y="3200400"/>
-            <a:ext cx="7315200" cy="868680"/>
+            <a:off x="685800" y="3200400"/>
+            <a:ext cx="7315200" cy="841248"/>
           </a:xfrm>
           <a:prstGeom prst="rect">
             <a:avLst/>
@@ -2917,18 +2940,18 @@
           <a:p>
             <a:pPr algn="l" indent="0" marL="0">
               <a:lnSpc>
-                <a:spcPct val="112000"/>
+                <a:spcPct val="108000"/>
               </a:lnSpc>
               <a:buNone/>
             </a:pPr>
             <a:r>
-              <a:rPr lang="en-US" sz="3600" b="1" dirty="0">
+              <a:rPr lang="en-US" sz="3600" b="1" spc="-20" kern="0" dirty="0">
                 <a:solidFill>
                   <a:srgbClr val="FFFFFF"/>
                 </a:solidFill>
-                <a:latin typeface="Meiryo" pitchFamily="34" charset="0"/>
-                <a:ea typeface="Meiryo" pitchFamily="34" charset="-122"/>
-                <a:cs typeface="Meiryo" pitchFamily="34" charset="-120"/>
+                <a:latin typeface="Yu Gothic" pitchFamily="34" charset="0"/>
+                <a:ea typeface="Yu Gothic" pitchFamily="34" charset="-122"/>
+                <a:cs typeface="Yu Gothic" pitchFamily="34" charset="-120"/>
               </a:rPr>
               <a:t>上期業績ハイライト</a:t>
             </a:r>
@@ -2944,7 +2967,7 @@
         </p:nvSpPr>
         <p:spPr>
           <a:xfrm>
-            <a:off x="640080" y="4434840"/>
+            <a:off x="685800" y="4434840"/>
             <a:ext cx="7315200" cy="548640"/>
           </a:xfrm>
           <a:prstGeom prst="rect">
@@ -2959,7 +2982,7 @@
           <a:p>
             <a:pPr algn="l" indent="0" marL="0">
               <a:lnSpc>
-                <a:spcPct val="130000"/>
+                <a:spcPct val="140000"/>
               </a:lnSpc>
               <a:buNone/>
             </a:pPr>
@@ -2968,9 +2991,9 @@
                 <a:solidFill>
                   <a:srgbClr val="AAB8C7"/>
                 </a:solidFill>
-                <a:latin typeface="Meiryo" pitchFamily="34" charset="0"/>
-                <a:ea typeface="Meiryo" pitchFamily="34" charset="-122"/>
-                <a:cs typeface="Meiryo" pitchFamily="34" charset="-120"/>
+                <a:latin typeface="Yu Gothic Medium" pitchFamily="34" charset="0"/>
+                <a:ea typeface="Yu Gothic Medium" pitchFamily="34" charset="-122"/>
+                <a:cs typeface="Yu Gothic Medium" pitchFamily="34" charset="-120"/>
               </a:rPr>
               <a:t>売上・利益・財務体質を順に確認します</a:t>
             </a:r>
@@ -3018,7 +3041,7 @@
         </p:nvSpPr>
         <p:spPr>
           <a:xfrm>
-            <a:off x="640080" y="690372"/>
+            <a:off x="685800" y="736092"/>
             <a:ext cx="118872" cy="118872"/>
           </a:xfrm>
           <a:prstGeom prst="ellipse">
@@ -3038,7 +3061,7 @@
         </p:nvSpPr>
         <p:spPr>
           <a:xfrm>
-            <a:off x="877824" y="640080"/>
+            <a:off x="923544" y="685800"/>
             <a:ext cx="7315200" cy="274320"/>
           </a:xfrm>
           <a:prstGeom prst="rect">
@@ -3055,17 +3078,17 @@
               <a:buNone/>
             </a:pPr>
             <a:r>
-              <a:rPr lang="en-US" sz="1250" b="1" spc="100" kern="0" dirty="0">
+              <a:rPr lang="en-US" sz="1200" b="1" spc="150" kern="0" dirty="0">
                 <a:solidFill>
                   <a:srgbClr val="0E7C86"/>
                 </a:solidFill>
-                <a:latin typeface="Meiryo" pitchFamily="34" charset="0"/>
-                <a:ea typeface="Meiryo" pitchFamily="34" charset="-122"/>
-                <a:cs typeface="Meiryo" pitchFamily="34" charset="-120"/>
+                <a:latin typeface="Yu Gothic" pitchFamily="34" charset="0"/>
+                <a:ea typeface="Yu Gothic" pitchFamily="34" charset="-122"/>
+                <a:cs typeface="Yu Gothic" pitchFamily="34" charset="-120"/>
               </a:rPr>
               <a:t>上期実績</a:t>
             </a:r>
-            <a:endParaRPr lang="en-US" sz="1250" dirty="0"/>
+            <a:endParaRPr lang="en-US" sz="1200" dirty="0"/>
           </a:p>
         </p:txBody>
       </p:sp>
@@ -3077,8 +3100,8 @@
         </p:nvSpPr>
         <p:spPr>
           <a:xfrm>
-            <a:off x="640080" y="1051560"/>
-            <a:ext cx="10911535" cy="868680"/>
+            <a:off x="685800" y="1051560"/>
+            <a:ext cx="10820095" cy="841248"/>
           </a:xfrm>
           <a:prstGeom prst="rect">
             <a:avLst/>
@@ -3092,22 +3115,22 @@
           <a:p>
             <a:pPr algn="l" indent="0" marL="0">
               <a:lnSpc>
-                <a:spcPct val="112000"/>
+                <a:spcPct val="108000"/>
               </a:lnSpc>
               <a:buNone/>
             </a:pPr>
             <a:r>
-              <a:rPr lang="en-US" sz="2800" b="1" dirty="0">
+              <a:rPr lang="en-US" sz="3000" b="1" spc="-20" kern="0" dirty="0">
                 <a:solidFill>
                   <a:srgbClr val="1B2735"/>
                 </a:solidFill>
-                <a:latin typeface="Meiryo" pitchFamily="34" charset="0"/>
-                <a:ea typeface="Meiryo" pitchFamily="34" charset="-122"/>
-                <a:cs typeface="Meiryo" pitchFamily="34" charset="-120"/>
+                <a:latin typeface="Yu Gothic" pitchFamily="34" charset="0"/>
+                <a:ea typeface="Yu Gothic" pitchFamily="34" charset="-122"/>
+                <a:cs typeface="Yu Gothic" pitchFamily="34" charset="-120"/>
               </a:rPr>
               <a:t>上期は増収・増益で着地</a:t>
             </a:r>
-            <a:endParaRPr lang="en-US" sz="2800" dirty="0"/>
+            <a:endParaRPr lang="en-US" sz="3000" dirty="0"/>
           </a:p>
         </p:txBody>
       </p:sp>
@@ -3119,12 +3142,12 @@
         </p:nvSpPr>
         <p:spPr>
           <a:xfrm>
-            <a:off x="640080" y="2468880"/>
-            <a:ext cx="2453564" cy="3154680"/>
+            <a:off x="685800" y="2468880"/>
+            <a:ext cx="2430704" cy="3154680"/>
           </a:xfrm>
           <a:prstGeom prst="roundRect">
             <a:avLst>
-              <a:gd name="adj" fmla="val 3354"/>
+              <a:gd name="adj" fmla="val 3762"/>
             </a:avLst>
           </a:prstGeom>
           <a:solidFill>
@@ -3134,7 +3157,7 @@
           <a:effectLst>
             <a:outerShdw sx="100000" sy="100000" kx="0" ky="0" algn="bl" rotWithShape="0" blurRad="127000" dist="50800" dir="5400000">
               <a:srgbClr val="1B2735">
-                <a:alpha val="12000"/>
+                <a:alpha val="10000"/>
               </a:srgbClr>
             </a:outerShdw>
           </a:effectLst>
@@ -3148,8 +3171,8 @@
         </p:nvSpPr>
         <p:spPr>
           <a:xfrm>
-            <a:off x="1005840" y="2926080"/>
-            <a:ext cx="1722044" cy="1097280"/>
+            <a:off x="1051560" y="2926080"/>
+            <a:ext cx="1699184" cy="1097280"/>
           </a:xfrm>
           <a:prstGeom prst="rect">
             <a:avLst/>
@@ -3169,9 +3192,9 @@
                 <a:solidFill>
                   <a:srgbClr val="0E7C86"/>
                 </a:solidFill>
-                <a:latin typeface="Meiryo" pitchFamily="34" charset="0"/>
-                <a:ea typeface="Meiryo" pitchFamily="34" charset="-122"/>
-                <a:cs typeface="Meiryo" pitchFamily="34" charset="-120"/>
+                <a:latin typeface="Yu Gothic" pitchFamily="34" charset="0"/>
+                <a:ea typeface="Yu Gothic" pitchFamily="34" charset="-122"/>
+                <a:cs typeface="Yu Gothic" pitchFamily="34" charset="-120"/>
               </a:rPr>
               <a:t>48.2億円</a:t>
             </a:r>
@@ -3187,8 +3210,8 @@
         </p:nvSpPr>
         <p:spPr>
           <a:xfrm>
-            <a:off x="1005840" y="4114800"/>
-            <a:ext cx="1722044" cy="457200"/>
+            <a:off x="1051560" y="4114800"/>
+            <a:ext cx="1699184" cy="457200"/>
           </a:xfrm>
           <a:prstGeom prst="rect">
             <a:avLst/>
@@ -3204,17 +3227,17 @@
               <a:buNone/>
             </a:pPr>
             <a:r>
-              <a:rPr lang="en-US" sz="1800" b="1" dirty="0">
+              <a:rPr lang="en-US" sz="1900" b="1" dirty="0">
                 <a:solidFill>
                   <a:srgbClr val="1B2735"/>
                 </a:solidFill>
-                <a:latin typeface="Meiryo" pitchFamily="34" charset="0"/>
-                <a:ea typeface="Meiryo" pitchFamily="34" charset="-122"/>
-                <a:cs typeface="Meiryo" pitchFamily="34" charset="-120"/>
+                <a:latin typeface="Yu Gothic" pitchFamily="34" charset="0"/>
+                <a:ea typeface="Yu Gothic" pitchFamily="34" charset="-122"/>
+                <a:cs typeface="Yu Gothic" pitchFamily="34" charset="-120"/>
               </a:rPr>
               <a:t>売上高</a:t>
             </a:r>
-            <a:endParaRPr lang="en-US" sz="1800" dirty="0"/>
+            <a:endParaRPr lang="en-US" sz="1900" dirty="0"/>
           </a:p>
         </p:txBody>
       </p:sp>
@@ -3226,8 +3249,8 @@
         </p:nvSpPr>
         <p:spPr>
           <a:xfrm>
-            <a:off x="1005840" y="4590288"/>
-            <a:ext cx="1722044" cy="868680"/>
+            <a:off x="1051560" y="4590288"/>
+            <a:ext cx="1699184" cy="868680"/>
           </a:xfrm>
           <a:prstGeom prst="rect">
             <a:avLst/>
@@ -3241,22 +3264,22 @@
           <a:p>
             <a:pPr algn="l" indent="0" marL="0">
               <a:lnSpc>
-                <a:spcPct val="130000"/>
+                <a:spcPct val="140000"/>
               </a:lnSpc>
               <a:buNone/>
             </a:pPr>
             <a:r>
-              <a:rPr lang="en-US" sz="1300" dirty="0">
+              <a:rPr lang="en-US" sz="1350" dirty="0">
                 <a:solidFill>
                   <a:srgbClr val="566373"/>
                 </a:solidFill>
-                <a:latin typeface="Meiryo" pitchFamily="34" charset="0"/>
-                <a:ea typeface="Meiryo" pitchFamily="34" charset="-122"/>
-                <a:cs typeface="Meiryo" pitchFamily="34" charset="-120"/>
+                <a:latin typeface="Yu Gothic Medium" pitchFamily="34" charset="0"/>
+                <a:ea typeface="Yu Gothic Medium" pitchFamily="34" charset="-122"/>
+                <a:cs typeface="Yu Gothic Medium" pitchFamily="34" charset="-120"/>
               </a:rPr>
               <a:t>前年同期 44.1億円（+9.3%）</a:t>
             </a:r>
-            <a:endParaRPr lang="en-US" sz="1300" dirty="0"/>
+            <a:endParaRPr lang="en-US" sz="1350" dirty="0"/>
           </a:p>
         </p:txBody>
       </p:sp>
@@ -3268,12 +3291,12 @@
         </p:nvSpPr>
         <p:spPr>
           <a:xfrm>
-            <a:off x="3459404" y="2468880"/>
-            <a:ext cx="2453564" cy="3154680"/>
+            <a:off x="3482264" y="2468880"/>
+            <a:ext cx="2430704" cy="3154680"/>
           </a:xfrm>
           <a:prstGeom prst="roundRect">
             <a:avLst>
-              <a:gd name="adj" fmla="val 3354"/>
+              <a:gd name="adj" fmla="val 3762"/>
             </a:avLst>
           </a:prstGeom>
           <a:solidFill>
@@ -3283,7 +3306,7 @@
           <a:effectLst>
             <a:outerShdw sx="100000" sy="100000" kx="0" ky="0" algn="bl" rotWithShape="0" blurRad="127000" dist="50800" dir="5400000">
               <a:srgbClr val="1B2735">
-                <a:alpha val="12000"/>
+                <a:alpha val="10000"/>
               </a:srgbClr>
             </a:outerShdw>
           </a:effectLst>
@@ -3297,8 +3320,8 @@
         </p:nvSpPr>
         <p:spPr>
           <a:xfrm>
-            <a:off x="3825164" y="2926080"/>
-            <a:ext cx="1722044" cy="1097280"/>
+            <a:off x="3848024" y="2926080"/>
+            <a:ext cx="1699184" cy="1097280"/>
           </a:xfrm>
           <a:prstGeom prst="rect">
             <a:avLst/>
@@ -3318,9 +3341,9 @@
                 <a:solidFill>
                   <a:srgbClr val="0E7C86"/>
                 </a:solidFill>
-                <a:latin typeface="Meiryo" pitchFamily="34" charset="0"/>
-                <a:ea typeface="Meiryo" pitchFamily="34" charset="-122"/>
-                <a:cs typeface="Meiryo" pitchFamily="34" charset="-120"/>
+                <a:latin typeface="Yu Gothic" pitchFamily="34" charset="0"/>
+                <a:ea typeface="Yu Gothic" pitchFamily="34" charset="-122"/>
+                <a:cs typeface="Yu Gothic" pitchFamily="34" charset="-120"/>
               </a:rPr>
               <a:t>4.05億円</a:t>
             </a:r>
@@ -3336,8 +3359,8 @@
         </p:nvSpPr>
         <p:spPr>
           <a:xfrm>
-            <a:off x="3825164" y="4114800"/>
-            <a:ext cx="1722044" cy="457200"/>
+            <a:off x="3848024" y="4114800"/>
+            <a:ext cx="1699184" cy="457200"/>
           </a:xfrm>
           <a:prstGeom prst="rect">
             <a:avLst/>
@@ -3353,17 +3376,17 @@
               <a:buNone/>
             </a:pPr>
             <a:r>
-              <a:rPr lang="en-US" sz="1800" b="1" dirty="0">
+              <a:rPr lang="en-US" sz="1900" b="1" dirty="0">
                 <a:solidFill>
                   <a:srgbClr val="1B2735"/>
                 </a:solidFill>
-                <a:latin typeface="Meiryo" pitchFamily="34" charset="0"/>
-                <a:ea typeface="Meiryo" pitchFamily="34" charset="-122"/>
-                <a:cs typeface="Meiryo" pitchFamily="34" charset="-120"/>
+                <a:latin typeface="Yu Gothic" pitchFamily="34" charset="0"/>
+                <a:ea typeface="Yu Gothic" pitchFamily="34" charset="-122"/>
+                <a:cs typeface="Yu Gothic" pitchFamily="34" charset="-120"/>
               </a:rPr>
               <a:t>営業利益</a:t>
             </a:r>
-            <a:endParaRPr lang="en-US" sz="1800" dirty="0"/>
+            <a:endParaRPr lang="en-US" sz="1900" dirty="0"/>
           </a:p>
         </p:txBody>
       </p:sp>
@@ -3375,8 +3398,8 @@
         </p:nvSpPr>
         <p:spPr>
           <a:xfrm>
-            <a:off x="3825164" y="4590288"/>
-            <a:ext cx="1722044" cy="868680"/>
+            <a:off x="3848024" y="4590288"/>
+            <a:ext cx="1699184" cy="868680"/>
           </a:xfrm>
           <a:prstGeom prst="rect">
             <a:avLst/>
@@ -3390,22 +3413,22 @@
           <a:p>
             <a:pPr algn="l" indent="0" marL="0">
               <a:lnSpc>
-                <a:spcPct val="130000"/>
+                <a:spcPct val="140000"/>
               </a:lnSpc>
               <a:buNone/>
             </a:pPr>
             <a:r>
-              <a:rPr lang="en-US" sz="1300" dirty="0">
+              <a:rPr lang="en-US" sz="1350" dirty="0">
                 <a:solidFill>
                   <a:srgbClr val="566373"/>
                 </a:solidFill>
-                <a:latin typeface="Meiryo" pitchFamily="34" charset="0"/>
-                <a:ea typeface="Meiryo" pitchFamily="34" charset="-122"/>
-                <a:cs typeface="Meiryo" pitchFamily="34" charset="-120"/>
+                <a:latin typeface="Yu Gothic Medium" pitchFamily="34" charset="0"/>
+                <a:ea typeface="Yu Gothic Medium" pitchFamily="34" charset="-122"/>
+                <a:cs typeface="Yu Gothic Medium" pitchFamily="34" charset="-120"/>
               </a:rPr>
               <a:t>前年同期 3.60億円（+12.5%）</a:t>
             </a:r>
-            <a:endParaRPr lang="en-US" sz="1300" dirty="0"/>
+            <a:endParaRPr lang="en-US" sz="1350" dirty="0"/>
           </a:p>
         </p:txBody>
       </p:sp>
@@ -3418,11 +3441,11 @@
         <p:spPr>
           <a:xfrm>
             <a:off x="6278728" y="2468880"/>
-            <a:ext cx="2453564" cy="3154680"/>
+            <a:ext cx="2430704" cy="3154680"/>
           </a:xfrm>
           <a:prstGeom prst="roundRect">
             <a:avLst>
-              <a:gd name="adj" fmla="val 3354"/>
+              <a:gd name="adj" fmla="val 3762"/>
             </a:avLst>
           </a:prstGeom>
           <a:solidFill>
@@ -3432,7 +3455,7 @@
           <a:effectLst>
             <a:outerShdw sx="100000" sy="100000" kx="0" ky="0" algn="bl" rotWithShape="0" blurRad="127000" dist="50800" dir="5400000">
               <a:srgbClr val="1B2735">
-                <a:alpha val="12000"/>
+                <a:alpha val="10000"/>
               </a:srgbClr>
             </a:outerShdw>
           </a:effectLst>
@@ -3447,7 +3470,7 @@
         <p:spPr>
           <a:xfrm>
             <a:off x="6644488" y="2926080"/>
-            <a:ext cx="1722044" cy="1097280"/>
+            <a:ext cx="1699184" cy="1097280"/>
           </a:xfrm>
           <a:prstGeom prst="rect">
             <a:avLst/>
@@ -3467,9 +3490,9 @@
                 <a:solidFill>
                   <a:srgbClr val="0A5E66"/>
                 </a:solidFill>
-                <a:latin typeface="Meiryo" pitchFamily="34" charset="0"/>
-                <a:ea typeface="Meiryo" pitchFamily="34" charset="-122"/>
-                <a:cs typeface="Meiryo" pitchFamily="34" charset="-120"/>
+                <a:latin typeface="Yu Gothic" pitchFamily="34" charset="0"/>
+                <a:ea typeface="Yu Gothic" pitchFamily="34" charset="-122"/>
+                <a:cs typeface="Yu Gothic" pitchFamily="34" charset="-120"/>
               </a:rPr>
               <a:t>8.4%</a:t>
             </a:r>
@@ -3486,7 +3509,7 @@
         <p:spPr>
           <a:xfrm>
             <a:off x="6644488" y="4114800"/>
-            <a:ext cx="1722044" cy="457200"/>
+            <a:ext cx="1699184" cy="457200"/>
           </a:xfrm>
           <a:prstGeom prst="rect">
             <a:avLst/>
@@ -3502,17 +3525,17 @@
               <a:buNone/>
             </a:pPr>
             <a:r>
-              <a:rPr lang="en-US" sz="1800" b="1" dirty="0">
+              <a:rPr lang="en-US" sz="1900" b="1" dirty="0">
                 <a:solidFill>
                   <a:srgbClr val="1B2735"/>
                 </a:solidFill>
-                <a:latin typeface="Meiryo" pitchFamily="34" charset="0"/>
-                <a:ea typeface="Meiryo" pitchFamily="34" charset="-122"/>
-                <a:cs typeface="Meiryo" pitchFamily="34" charset="-120"/>
+                <a:latin typeface="Yu Gothic" pitchFamily="34" charset="0"/>
+                <a:ea typeface="Yu Gothic" pitchFamily="34" charset="-122"/>
+                <a:cs typeface="Yu Gothic" pitchFamily="34" charset="-120"/>
               </a:rPr>
               <a:t>営業利益率</a:t>
             </a:r>
-            <a:endParaRPr lang="en-US" sz="1800" dirty="0"/>
+            <a:endParaRPr lang="en-US" sz="1900" dirty="0"/>
           </a:p>
         </p:txBody>
       </p:sp>
@@ -3525,7 +3548,7 @@
         <p:spPr>
           <a:xfrm>
             <a:off x="6644488" y="4590288"/>
-            <a:ext cx="1722044" cy="868680"/>
+            <a:ext cx="1699184" cy="868680"/>
           </a:xfrm>
           <a:prstGeom prst="rect">
             <a:avLst/>
@@ -3539,22 +3562,22 @@
           <a:p>
             <a:pPr algn="l" indent="0" marL="0">
               <a:lnSpc>
-                <a:spcPct val="130000"/>
+                <a:spcPct val="140000"/>
               </a:lnSpc>
               <a:buNone/>
             </a:pPr>
             <a:r>
-              <a:rPr lang="en-US" sz="1300" dirty="0">
+              <a:rPr lang="en-US" sz="1350" dirty="0">
                 <a:solidFill>
                   <a:srgbClr val="566373"/>
                 </a:solidFill>
-                <a:latin typeface="Meiryo" pitchFamily="34" charset="0"/>
-                <a:ea typeface="Meiryo" pitchFamily="34" charset="-122"/>
-                <a:cs typeface="Meiryo" pitchFamily="34" charset="-120"/>
+                <a:latin typeface="Yu Gothic Medium" pitchFamily="34" charset="0"/>
+                <a:ea typeface="Yu Gothic Medium" pitchFamily="34" charset="-122"/>
+                <a:cs typeface="Yu Gothic Medium" pitchFamily="34" charset="-120"/>
               </a:rPr>
               <a:t>前年同期 7.0%</a:t>
             </a:r>
-            <a:endParaRPr lang="en-US" sz="1300" dirty="0"/>
+            <a:endParaRPr lang="en-US" sz="1350" dirty="0"/>
           </a:p>
         </p:txBody>
       </p:sp>
@@ -3566,12 +3589,12 @@
         </p:nvSpPr>
         <p:spPr>
           <a:xfrm>
-            <a:off x="9098051" y="2468880"/>
-            <a:ext cx="2453564" cy="3154680"/>
+            <a:off x="9075191" y="2468880"/>
+            <a:ext cx="2430704" cy="3154680"/>
           </a:xfrm>
           <a:prstGeom prst="roundRect">
             <a:avLst>
-              <a:gd name="adj" fmla="val 3354"/>
+              <a:gd name="adj" fmla="val 3762"/>
             </a:avLst>
           </a:prstGeom>
           <a:solidFill>
@@ -3581,7 +3604,7 @@
           <a:effectLst>
             <a:outerShdw sx="100000" sy="100000" kx="0" ky="0" algn="bl" rotWithShape="0" blurRad="127000" dist="50800" dir="5400000">
               <a:srgbClr val="1B2735">
-                <a:alpha val="12000"/>
+                <a:alpha val="10000"/>
               </a:srgbClr>
             </a:outerShdw>
           </a:effectLst>
@@ -3595,8 +3618,8 @@
         </p:nvSpPr>
         <p:spPr>
           <a:xfrm>
-            <a:off x="9463811" y="2926080"/>
-            <a:ext cx="1722044" cy="1097280"/>
+            <a:off x="9440951" y="2926080"/>
+            <a:ext cx="1699184" cy="1097280"/>
           </a:xfrm>
           <a:prstGeom prst="rect">
             <a:avLst/>
@@ -3616,9 +3639,9 @@
                 <a:solidFill>
                   <a:srgbClr val="0E7C86"/>
                 </a:solidFill>
-                <a:latin typeface="Meiryo" pitchFamily="34" charset="0"/>
-                <a:ea typeface="Meiryo" pitchFamily="34" charset="-122"/>
-                <a:cs typeface="Meiryo" pitchFamily="34" charset="-120"/>
+                <a:latin typeface="Yu Gothic" pitchFamily="34" charset="0"/>
+                <a:ea typeface="Yu Gothic" pitchFamily="34" charset="-122"/>
+                <a:cs typeface="Yu Gothic" pitchFamily="34" charset="-120"/>
               </a:rPr>
               <a:t>52%</a:t>
             </a:r>
@@ -3634,8 +3657,8 @@
         </p:nvSpPr>
         <p:spPr>
           <a:xfrm>
-            <a:off x="9463811" y="4114800"/>
-            <a:ext cx="1722044" cy="457200"/>
+            <a:off x="9440951" y="4114800"/>
+            <a:ext cx="1699184" cy="457200"/>
           </a:xfrm>
           <a:prstGeom prst="rect">
             <a:avLst/>
@@ -3651,17 +3674,17 @@
               <a:buNone/>
             </a:pPr>
             <a:r>
-              <a:rPr lang="en-US" sz="1800" b="1" dirty="0">
+              <a:rPr lang="en-US" sz="1900" b="1" dirty="0">
                 <a:solidFill>
                   <a:srgbClr val="1B2735"/>
                 </a:solidFill>
-                <a:latin typeface="Meiryo" pitchFamily="34" charset="0"/>
-                <a:ea typeface="Meiryo" pitchFamily="34" charset="-122"/>
-                <a:cs typeface="Meiryo" pitchFamily="34" charset="-120"/>
+                <a:latin typeface="Yu Gothic" pitchFamily="34" charset="0"/>
+                <a:ea typeface="Yu Gothic" pitchFamily="34" charset="-122"/>
+                <a:cs typeface="Yu Gothic" pitchFamily="34" charset="-120"/>
               </a:rPr>
               <a:t>自己資本比率</a:t>
             </a:r>
-            <a:endParaRPr lang="en-US" sz="1800" dirty="0"/>
+            <a:endParaRPr lang="en-US" sz="1900" dirty="0"/>
           </a:p>
         </p:txBody>
       </p:sp>
@@ -3673,8 +3696,8 @@
         </p:nvSpPr>
         <p:spPr>
           <a:xfrm>
-            <a:off x="9463811" y="4590288"/>
-            <a:ext cx="1722044" cy="868680"/>
+            <a:off x="9440951" y="4590288"/>
+            <a:ext cx="1699184" cy="868680"/>
           </a:xfrm>
           <a:prstGeom prst="rect">
             <a:avLst/>
@@ -3688,22 +3711,22 @@
           <a:p>
             <a:pPr algn="l" indent="0" marL="0">
               <a:lnSpc>
-                <a:spcPct val="130000"/>
+                <a:spcPct val="140000"/>
               </a:lnSpc>
               <a:buNone/>
             </a:pPr>
             <a:r>
-              <a:rPr lang="en-US" sz="1300" dirty="0">
+              <a:rPr lang="en-US" sz="1350" dirty="0">
                 <a:solidFill>
                   <a:srgbClr val="566373"/>
                 </a:solidFill>
-                <a:latin typeface="Meiryo" pitchFamily="34" charset="0"/>
-                <a:ea typeface="Meiryo" pitchFamily="34" charset="-122"/>
-                <a:cs typeface="Meiryo" pitchFamily="34" charset="-120"/>
+                <a:latin typeface="Yu Gothic Medium" pitchFamily="34" charset="0"/>
+                <a:ea typeface="Yu Gothic Medium" pitchFamily="34" charset="-122"/>
+                <a:cs typeface="Yu Gothic Medium" pitchFamily="34" charset="-120"/>
               </a:rPr>
               <a:t>前期末 49%</a:t>
             </a:r>
-            <a:endParaRPr lang="en-US" sz="1300" dirty="0"/>
+            <a:endParaRPr lang="en-US" sz="1350" dirty="0"/>
           </a:p>
         </p:txBody>
       </p:sp>
@@ -3715,7 +3738,7 @@
         </p:nvSpPr>
         <p:spPr>
           <a:xfrm>
-            <a:off x="640080" y="6473952"/>
+            <a:off x="685800" y="6473952"/>
             <a:ext cx="2743200" cy="274320"/>
           </a:xfrm>
           <a:prstGeom prst="rect">
@@ -3732,17 +3755,17 @@
               <a:buNone/>
             </a:pPr>
             <a:r>
-              <a:rPr lang="en-US" sz="1100" dirty="0">
+              <a:rPr lang="en-US" sz="1200" dirty="0">
                 <a:solidFill>
                   <a:srgbClr val="8A98A6"/>
                 </a:solidFill>
-                <a:latin typeface="Meiryo" pitchFamily="34" charset="0"/>
-                <a:ea typeface="Meiryo" pitchFamily="34" charset="-122"/>
-                <a:cs typeface="Meiryo" pitchFamily="34" charset="-120"/>
+                <a:latin typeface="Yu Gothic" pitchFamily="34" charset="0"/>
+                <a:ea typeface="Yu Gothic" pitchFamily="34" charset="-122"/>
+                <a:cs typeface="Yu Gothic" pitchFamily="34" charset="-120"/>
               </a:rPr>
               <a:t>サンプル製造</a:t>
             </a:r>
-            <a:endParaRPr lang="en-US" sz="1100" dirty="0"/>
+            <a:endParaRPr lang="en-US" sz="1200" dirty="0"/>
           </a:p>
         </p:txBody>
       </p:sp>
@@ -3754,7 +3777,7 @@
         </p:nvSpPr>
         <p:spPr>
           <a:xfrm>
-            <a:off x="10637215" y="6473952"/>
+            <a:off x="10591495" y="6473952"/>
             <a:ext cx="914400" cy="274320"/>
           </a:xfrm>
           <a:prstGeom prst="rect">
@@ -3771,17 +3794,17 @@
               <a:buNone/>
             </a:pPr>
             <a:r>
-              <a:rPr lang="en-US" sz="1100" dirty="0">
+              <a:rPr lang="en-US" sz="1200" dirty="0">
                 <a:solidFill>
                   <a:srgbClr val="8A98A6"/>
                 </a:solidFill>
-                <a:latin typeface="Meiryo" pitchFamily="34" charset="0"/>
-                <a:ea typeface="Meiryo" pitchFamily="34" charset="-122"/>
-                <a:cs typeface="Meiryo" pitchFamily="34" charset="-120"/>
+                <a:latin typeface="Yu Gothic" pitchFamily="34" charset="0"/>
+                <a:ea typeface="Yu Gothic" pitchFamily="34" charset="-122"/>
+                <a:cs typeface="Yu Gothic" pitchFamily="34" charset="-120"/>
               </a:rPr>
               <a:t>4</a:t>
             </a:r>
-            <a:endParaRPr lang="en-US" sz="1100" dirty="0"/>
+            <a:endParaRPr lang="en-US" sz="1200" dirty="0"/>
           </a:p>
         </p:txBody>
       </p:sp>
@@ -3825,7 +3848,7 @@
         </p:nvSpPr>
         <p:spPr>
           <a:xfrm>
-            <a:off x="640080" y="690372"/>
+            <a:off x="685800" y="736092"/>
             <a:ext cx="118872" cy="118872"/>
           </a:xfrm>
           <a:prstGeom prst="ellipse">
@@ -3845,7 +3868,7 @@
         </p:nvSpPr>
         <p:spPr>
           <a:xfrm>
-            <a:off x="877824" y="640080"/>
+            <a:off x="923544" y="685800"/>
             <a:ext cx="7315200" cy="274320"/>
           </a:xfrm>
           <a:prstGeom prst="rect">
@@ -3862,17 +3885,17 @@
               <a:buNone/>
             </a:pPr>
             <a:r>
-              <a:rPr lang="en-US" sz="1250" b="1" spc="100" kern="0" dirty="0">
+              <a:rPr lang="en-US" sz="1200" b="1" spc="150" kern="0" dirty="0">
                 <a:solidFill>
                   <a:srgbClr val="0E7C86"/>
                 </a:solidFill>
-                <a:latin typeface="Meiryo" pitchFamily="34" charset="0"/>
-                <a:ea typeface="Meiryo" pitchFamily="34" charset="-122"/>
-                <a:cs typeface="Meiryo" pitchFamily="34" charset="-120"/>
+                <a:latin typeface="Yu Gothic" pitchFamily="34" charset="0"/>
+                <a:ea typeface="Yu Gothic" pitchFamily="34" charset="-122"/>
+                <a:cs typeface="Yu Gothic" pitchFamily="34" charset="-120"/>
               </a:rPr>
               <a:t>四半期推移</a:t>
             </a:r>
-            <a:endParaRPr lang="en-US" sz="1250" dirty="0"/>
+            <a:endParaRPr lang="en-US" sz="1200" dirty="0"/>
           </a:p>
         </p:txBody>
       </p:sp>
@@ -3884,8 +3907,8 @@
         </p:nvSpPr>
         <p:spPr>
           <a:xfrm>
-            <a:off x="640080" y="1051560"/>
-            <a:ext cx="7772400" cy="868680"/>
+            <a:off x="685800" y="1051560"/>
+            <a:ext cx="7772400" cy="841248"/>
           </a:xfrm>
           <a:prstGeom prst="rect">
             <a:avLst/>
@@ -3899,22 +3922,22 @@
           <a:p>
             <a:pPr algn="l" indent="0" marL="0">
               <a:lnSpc>
-                <a:spcPct val="112000"/>
+                <a:spcPct val="108000"/>
               </a:lnSpc>
               <a:buNone/>
             </a:pPr>
             <a:r>
-              <a:rPr lang="en-US" sz="2800" b="1" dirty="0">
+              <a:rPr lang="en-US" sz="3000" b="1" spc="-20" kern="0" dirty="0">
                 <a:solidFill>
                   <a:srgbClr val="1B2735"/>
                 </a:solidFill>
-                <a:latin typeface="Meiryo" pitchFamily="34" charset="0"/>
-                <a:ea typeface="Meiryo" pitchFamily="34" charset="-122"/>
-                <a:cs typeface="Meiryo" pitchFamily="34" charset="-120"/>
+                <a:latin typeface="Yu Gothic" pitchFamily="34" charset="0"/>
+                <a:ea typeface="Yu Gothic" pitchFamily="34" charset="-122"/>
+                <a:cs typeface="Yu Gothic" pitchFamily="34" charset="-120"/>
               </a:rPr>
               <a:t>直近2四半期で、増収が加速</a:t>
             </a:r>
-            <a:endParaRPr lang="en-US" sz="2800" dirty="0"/>
+            <a:endParaRPr lang="en-US" sz="3000" dirty="0"/>
           </a:p>
         </p:txBody>
       </p:sp>
@@ -3925,8 +3948,8 @@
           <p:nvPr/>
         </p:nvGraphicFramePr>
         <p:xfrm>
-          <a:off x="640080" y="1965960"/>
-          <a:ext cx="6858000" cy="4023360"/>
+          <a:off x="685800" y="2011680"/>
+          <a:ext cx="6766560" cy="4023360"/>
         </p:xfrm>
         <a:graphic xmlns:a="http://schemas.openxmlformats.org/drawingml/2006/main">
           <a:graphicData uri="http://schemas.openxmlformats.org/drawingml/2006/chart">
@@ -3942,12 +3965,12 @@
         </p:nvSpPr>
         <p:spPr>
           <a:xfrm>
-            <a:off x="7818120" y="2148840"/>
-            <a:ext cx="3733495" cy="3566160"/>
+            <a:off x="7818120" y="2194560"/>
+            <a:ext cx="3687775" cy="3520440"/>
           </a:xfrm>
           <a:prstGeom prst="roundRect">
             <a:avLst>
-              <a:gd name="adj" fmla="val 2308"/>
+              <a:gd name="adj" fmla="val 2597"/>
             </a:avLst>
           </a:prstGeom>
           <a:solidFill>
@@ -3957,7 +3980,7 @@
           <a:effectLst>
             <a:outerShdw sx="100000" sy="100000" kx="0" ky="0" algn="bl" rotWithShape="0" blurRad="127000" dist="50800" dir="5400000">
               <a:srgbClr val="1B2735">
-                <a:alpha val="12000"/>
+                <a:alpha val="10000"/>
               </a:srgbClr>
             </a:outerShdw>
           </a:effectLst>
@@ -3971,8 +3994,8 @@
         </p:nvSpPr>
         <p:spPr>
           <a:xfrm>
-            <a:off x="8183880" y="2514600"/>
-            <a:ext cx="3001975" cy="731520"/>
+            <a:off x="8202168" y="2560320"/>
+            <a:ext cx="2919679" cy="731520"/>
           </a:xfrm>
           <a:prstGeom prst="rect">
             <a:avLst/>
@@ -3986,7 +4009,7 @@
           <a:p>
             <a:pPr algn="l" indent="0" marL="0">
               <a:lnSpc>
-                <a:spcPct val="115000"/>
+                <a:spcPct val="108000"/>
               </a:lnSpc>
               <a:buNone/>
             </a:pPr>
@@ -3995,9 +4018,9 @@
                 <a:solidFill>
                   <a:srgbClr val="0A5E66"/>
                 </a:solidFill>
-                <a:latin typeface="Meiryo" pitchFamily="34" charset="0"/>
-                <a:ea typeface="Meiryo" pitchFamily="34" charset="-122"/>
-                <a:cs typeface="Meiryo" pitchFamily="34" charset="-120"/>
+                <a:latin typeface="Yu Gothic" pitchFamily="34" charset="0"/>
+                <a:ea typeface="Yu Gothic" pitchFamily="34" charset="-122"/>
+                <a:cs typeface="Yu Gothic" pitchFamily="34" charset="-120"/>
               </a:rPr>
               <a:t>受注増 → 増収</a:t>
             </a:r>
@@ -4013,8 +4036,8 @@
         </p:nvSpPr>
         <p:spPr>
           <a:xfrm>
-            <a:off x="8183880" y="3429000"/>
-            <a:ext cx="3001975" cy="2103120"/>
+            <a:off x="8202168" y="3456432"/>
+            <a:ext cx="2919679" cy="2103120"/>
           </a:xfrm>
           <a:prstGeom prst="rect">
             <a:avLst/>
@@ -4028,7 +4051,7 @@
           <a:p>
             <a:pPr algn="l" indent="0" marL="0">
               <a:lnSpc>
-                <a:spcPct val="145000"/>
+                <a:spcPct val="160000"/>
               </a:lnSpc>
               <a:buNone/>
             </a:pPr>
@@ -4037,9 +4060,9 @@
                 <a:solidFill>
                   <a:srgbClr val="1B2735"/>
                 </a:solidFill>
-                <a:latin typeface="Meiryo" pitchFamily="34" charset="0"/>
-                <a:ea typeface="Meiryo" pitchFamily="34" charset="-122"/>
-                <a:cs typeface="Meiryo" pitchFamily="34" charset="-120"/>
+                <a:latin typeface="Yu Gothic Medium" pitchFamily="34" charset="0"/>
+                <a:ea typeface="Yu Gothic Medium" pitchFamily="34" charset="-122"/>
+                <a:cs typeface="Yu Gothic Medium" pitchFamily="34" charset="-120"/>
               </a:rPr>
               <a:t>産業機械の受注が当Q1以降伸び、当Q2は前年同四半期比+11%。下期もこの基調を維持できるかが焦点です。※速報・社内管理ベース</a:t>
             </a:r>
@@ -4055,7 +4078,7 @@
         </p:nvSpPr>
         <p:spPr>
           <a:xfrm>
-            <a:off x="640080" y="6473952"/>
+            <a:off x="685800" y="6473952"/>
             <a:ext cx="2743200" cy="274320"/>
           </a:xfrm>
           <a:prstGeom prst="rect">
@@ -4072,17 +4095,17 @@
               <a:buNone/>
             </a:pPr>
             <a:r>
-              <a:rPr lang="en-US" sz="1100" dirty="0">
+              <a:rPr lang="en-US" sz="1200" dirty="0">
                 <a:solidFill>
                   <a:srgbClr val="8A98A6"/>
                 </a:solidFill>
-                <a:latin typeface="Meiryo" pitchFamily="34" charset="0"/>
-                <a:ea typeface="Meiryo" pitchFamily="34" charset="-122"/>
-                <a:cs typeface="Meiryo" pitchFamily="34" charset="-120"/>
+                <a:latin typeface="Yu Gothic" pitchFamily="34" charset="0"/>
+                <a:ea typeface="Yu Gothic" pitchFamily="34" charset="-122"/>
+                <a:cs typeface="Yu Gothic" pitchFamily="34" charset="-120"/>
               </a:rPr>
               <a:t>サンプル製造</a:t>
             </a:r>
-            <a:endParaRPr lang="en-US" sz="1100" dirty="0"/>
+            <a:endParaRPr lang="en-US" sz="1200" dirty="0"/>
           </a:p>
         </p:txBody>
       </p:sp>
@@ -4094,7 +4117,7 @@
         </p:nvSpPr>
         <p:spPr>
           <a:xfrm>
-            <a:off x="10637215" y="6473952"/>
+            <a:off x="10591495" y="6473952"/>
             <a:ext cx="914400" cy="274320"/>
           </a:xfrm>
           <a:prstGeom prst="rect">
@@ -4111,17 +4134,17 @@
               <a:buNone/>
             </a:pPr>
             <a:r>
-              <a:rPr lang="en-US" sz="1100" dirty="0">
+              <a:rPr lang="en-US" sz="1200" dirty="0">
                 <a:solidFill>
                   <a:srgbClr val="8A98A6"/>
                 </a:solidFill>
-                <a:latin typeface="Meiryo" pitchFamily="34" charset="0"/>
-                <a:ea typeface="Meiryo" pitchFamily="34" charset="-122"/>
-                <a:cs typeface="Meiryo" pitchFamily="34" charset="-120"/>
+                <a:latin typeface="Yu Gothic" pitchFamily="34" charset="0"/>
+                <a:ea typeface="Yu Gothic" pitchFamily="34" charset="-122"/>
+                <a:cs typeface="Yu Gothic" pitchFamily="34" charset="-120"/>
               </a:rPr>
               <a:t>5</a:t>
             </a:r>
-            <a:endParaRPr lang="en-US" sz="1100" dirty="0"/>
+            <a:endParaRPr lang="en-US" sz="1200" dirty="0"/>
           </a:p>
         </p:txBody>
       </p:sp>
@@ -4165,7 +4188,7 @@
         </p:nvSpPr>
         <p:spPr>
           <a:xfrm>
-            <a:off x="640080" y="690372"/>
+            <a:off x="685800" y="736092"/>
             <a:ext cx="118872" cy="118872"/>
           </a:xfrm>
           <a:prstGeom prst="ellipse">
@@ -4185,7 +4208,7 @@
         </p:nvSpPr>
         <p:spPr>
           <a:xfrm>
-            <a:off x="877824" y="640080"/>
+            <a:off x="923544" y="685800"/>
             <a:ext cx="7315200" cy="274320"/>
           </a:xfrm>
           <a:prstGeom prst="rect">
@@ -4202,17 +4225,17 @@
               <a:buNone/>
             </a:pPr>
             <a:r>
-              <a:rPr lang="en-US" sz="1250" b="1" spc="100" kern="0" dirty="0">
+              <a:rPr lang="en-US" sz="1200" b="1" spc="150" kern="0" dirty="0">
                 <a:solidFill>
                   <a:srgbClr val="0E7C86"/>
                 </a:solidFill>
-                <a:latin typeface="Meiryo" pitchFamily="34" charset="0"/>
-                <a:ea typeface="Meiryo" pitchFamily="34" charset="-122"/>
-                <a:cs typeface="Meiryo" pitchFamily="34" charset="-120"/>
+                <a:latin typeface="Yu Gothic" pitchFamily="34" charset="0"/>
+                <a:ea typeface="Yu Gothic" pitchFamily="34" charset="-122"/>
+                <a:cs typeface="Yu Gothic" pitchFamily="34" charset="-120"/>
               </a:rPr>
               <a:t>セグメント別</a:t>
             </a:r>
-            <a:endParaRPr lang="en-US" sz="1250" dirty="0"/>
+            <a:endParaRPr lang="en-US" sz="1200" dirty="0"/>
           </a:p>
         </p:txBody>
       </p:sp>
@@ -4224,8 +4247,8 @@
         </p:nvSpPr>
         <p:spPr>
           <a:xfrm>
-            <a:off x="640080" y="1051560"/>
-            <a:ext cx="10911535" cy="868680"/>
+            <a:off x="685800" y="1051560"/>
+            <a:ext cx="10820095" cy="841248"/>
           </a:xfrm>
           <a:prstGeom prst="rect">
             <a:avLst/>
@@ -4239,22 +4262,22 @@
           <a:p>
             <a:pPr algn="l" indent="0" marL="0">
               <a:lnSpc>
-                <a:spcPct val="112000"/>
+                <a:spcPct val="108000"/>
               </a:lnSpc>
               <a:buNone/>
             </a:pPr>
             <a:r>
-              <a:rPr lang="en-US" sz="2800" b="1" dirty="0">
+              <a:rPr lang="en-US" sz="3000" b="1" spc="-20" kern="0" dirty="0">
                 <a:solidFill>
                   <a:srgbClr val="1B2735"/>
                 </a:solidFill>
-                <a:latin typeface="Meiryo" pitchFamily="34" charset="0"/>
-                <a:ea typeface="Meiryo" pitchFamily="34" charset="-122"/>
-                <a:cs typeface="Meiryo" pitchFamily="34" charset="-120"/>
+                <a:latin typeface="Yu Gothic" pitchFamily="34" charset="0"/>
+                <a:ea typeface="Yu Gothic" pitchFamily="34" charset="-122"/>
+                <a:cs typeface="Yu Gothic" pitchFamily="34" charset="-120"/>
               </a:rPr>
               <a:t>利益の源泉は産業機械セグメント</a:t>
             </a:r>
-            <a:endParaRPr lang="en-US" sz="2800" dirty="0"/>
+            <a:endParaRPr lang="en-US" sz="3000" dirty="0"/>
           </a:p>
         </p:txBody>
       </p:sp>
@@ -4273,19 +4296,19 @@
           </p:nvPr>
         </p:nvGraphicFramePr>
         <p:xfrm>
-          <a:off x="640080" y="2057400"/>
-          <a:ext cx="10911535" cy="914400"/>
+          <a:off x="685800" y="2057400"/>
+          <a:ext cx="10820095" cy="914400"/>
         </p:xfrm>
         <a:graphic>
           <a:graphicData uri="http://schemas.openxmlformats.org/drawingml/2006/table">
             <a:tbl>
               <a:tblPr/>
               <a:tblGrid>
-                <a:gridCol w="2182307"/>
-                <a:gridCol w="2182307"/>
-                <a:gridCol w="2182307"/>
-                <a:gridCol w="2182307"/>
-                <a:gridCol w="2182307"/>
+                <a:gridCol w="2164019"/>
+                <a:gridCol w="2164019"/>
+                <a:gridCol w="2164019"/>
+                <a:gridCol w="2164019"/>
+                <a:gridCol w="2164019"/>
               </a:tblGrid>
               <a:tr h="566928">
                 <a:tc>
@@ -4301,16 +4324,16 @@
                           <a:solidFill>
                             <a:srgbClr val="FFFFFF"/>
                           </a:solidFill>
-                          <a:latin typeface="Meiryo" pitchFamily="34" charset="0"/>
-                          <a:ea typeface="Meiryo" pitchFamily="34" charset="-122"/>
-                          <a:cs typeface="Meiryo" pitchFamily="34" charset="-120"/>
+                          <a:latin typeface="Yu Gothic" pitchFamily="34" charset="0"/>
+                          <a:ea typeface="Yu Gothic" pitchFamily="34" charset="-122"/>
+                          <a:cs typeface="Yu Gothic" pitchFamily="34" charset="-120"/>
                         </a:rPr>
                         <a:t>セグメント</a:t>
                       </a:r>
                       <a:endParaRPr lang="en-US" sz="1500" dirty="0">
-                        <a:latin typeface="Meiryo" charset="0"/>
-                        <a:ea typeface="Meiryo" charset="0"/>
-                        <a:cs typeface="Meiryo" charset="0"/>
+                        <a:latin typeface="Yu Gothic" charset="0"/>
+                        <a:ea typeface="Yu Gothic" charset="0"/>
+                        <a:cs typeface="Yu Gothic" charset="0"/>
                       </a:endParaRPr>
                     </a:p>
                   </a:txBody>
@@ -4369,16 +4392,16 @@
                           <a:solidFill>
                             <a:srgbClr val="FFFFFF"/>
                           </a:solidFill>
-                          <a:latin typeface="Meiryo" pitchFamily="34" charset="0"/>
-                          <a:ea typeface="Meiryo" pitchFamily="34" charset="-122"/>
-                          <a:cs typeface="Meiryo" pitchFamily="34" charset="-120"/>
+                          <a:latin typeface="Yu Gothic" pitchFamily="34" charset="0"/>
+                          <a:ea typeface="Yu Gothic" pitchFamily="34" charset="-122"/>
+                          <a:cs typeface="Yu Gothic" pitchFamily="34" charset="-120"/>
                         </a:rPr>
                         <a:t>売上高</a:t>
                       </a:r>
                       <a:endParaRPr lang="en-US" sz="1500" dirty="0">
-                        <a:latin typeface="Meiryo" charset="0"/>
-                        <a:ea typeface="Meiryo" charset="0"/>
-                        <a:cs typeface="Meiryo" charset="0"/>
+                        <a:latin typeface="Yu Gothic" charset="0"/>
+                        <a:ea typeface="Yu Gothic" charset="0"/>
+                        <a:cs typeface="Yu Gothic" charset="0"/>
                       </a:endParaRPr>
                     </a:p>
                   </a:txBody>
@@ -4437,16 +4460,16 @@
                           <a:solidFill>
                             <a:srgbClr val="FFFFFF"/>
                           </a:solidFill>
-                          <a:latin typeface="Meiryo" pitchFamily="34" charset="0"/>
-                          <a:ea typeface="Meiryo" pitchFamily="34" charset="-122"/>
-                          <a:cs typeface="Meiryo" pitchFamily="34" charset="-120"/>
+                          <a:latin typeface="Yu Gothic" pitchFamily="34" charset="0"/>
+                          <a:ea typeface="Yu Gothic" pitchFamily="34" charset="-122"/>
+                          <a:cs typeface="Yu Gothic" pitchFamily="34" charset="-120"/>
                         </a:rPr>
                         <a:t>構成比</a:t>
                       </a:r>
                       <a:endParaRPr lang="en-US" sz="1500" dirty="0">
-                        <a:latin typeface="Meiryo" charset="0"/>
-                        <a:ea typeface="Meiryo" charset="0"/>
-                        <a:cs typeface="Meiryo" charset="0"/>
+                        <a:latin typeface="Yu Gothic" charset="0"/>
+                        <a:ea typeface="Yu Gothic" charset="0"/>
+                        <a:cs typeface="Yu Gothic" charset="0"/>
                       </a:endParaRPr>
                     </a:p>
                   </a:txBody>
@@ -4505,16 +4528,16 @@
                           <a:solidFill>
                             <a:srgbClr val="FFFFFF"/>
                           </a:solidFill>
-                          <a:latin typeface="Meiryo" pitchFamily="34" charset="0"/>
-                          <a:ea typeface="Meiryo" pitchFamily="34" charset="-122"/>
-                          <a:cs typeface="Meiryo" pitchFamily="34" charset="-120"/>
+                          <a:latin typeface="Yu Gothic" pitchFamily="34" charset="0"/>
+                          <a:ea typeface="Yu Gothic" pitchFamily="34" charset="-122"/>
+                          <a:cs typeface="Yu Gothic" pitchFamily="34" charset="-120"/>
                         </a:rPr>
                         <a:t>営業利益</a:t>
                       </a:r>
                       <a:endParaRPr lang="en-US" sz="1500" dirty="0">
-                        <a:latin typeface="Meiryo" charset="0"/>
-                        <a:ea typeface="Meiryo" charset="0"/>
-                        <a:cs typeface="Meiryo" charset="0"/>
+                        <a:latin typeface="Yu Gothic" charset="0"/>
+                        <a:ea typeface="Yu Gothic" charset="0"/>
+                        <a:cs typeface="Yu Gothic" charset="0"/>
                       </a:endParaRPr>
                     </a:p>
                   </a:txBody>
@@ -4573,16 +4596,16 @@
                           <a:solidFill>
                             <a:srgbClr val="FFFFFF"/>
                           </a:solidFill>
-                          <a:latin typeface="Meiryo" pitchFamily="34" charset="0"/>
-                          <a:ea typeface="Meiryo" pitchFamily="34" charset="-122"/>
-                          <a:cs typeface="Meiryo" pitchFamily="34" charset="-120"/>
+                          <a:latin typeface="Yu Gothic" pitchFamily="34" charset="0"/>
+                          <a:ea typeface="Yu Gothic" pitchFamily="34" charset="-122"/>
+                          <a:cs typeface="Yu Gothic" pitchFamily="34" charset="-120"/>
                         </a:rPr>
                         <a:t>利益率</a:t>
                       </a:r>
                       <a:endParaRPr lang="en-US" sz="1500" dirty="0">
-                        <a:latin typeface="Meiryo" charset="0"/>
-                        <a:ea typeface="Meiryo" charset="0"/>
-                        <a:cs typeface="Meiryo" charset="0"/>
+                        <a:latin typeface="Yu Gothic" charset="0"/>
+                        <a:ea typeface="Yu Gothic" charset="0"/>
+                        <a:cs typeface="Yu Gothic" charset="0"/>
                       </a:endParaRPr>
                     </a:p>
                   </a:txBody>
@@ -4643,16 +4666,16 @@
                           <a:solidFill>
                             <a:srgbClr val="1B2735"/>
                           </a:solidFill>
-                          <a:latin typeface="Meiryo" pitchFamily="34" charset="0"/>
-                          <a:ea typeface="Meiryo" pitchFamily="34" charset="-122"/>
-                          <a:cs typeface="Meiryo" pitchFamily="34" charset="-120"/>
+                          <a:latin typeface="Yu Gothic Medium" pitchFamily="34" charset="0"/>
+                          <a:ea typeface="Yu Gothic Medium" pitchFamily="34" charset="-122"/>
+                          <a:cs typeface="Yu Gothic Medium" pitchFamily="34" charset="-120"/>
                         </a:rPr>
                         <a:t>産業機械</a:t>
                       </a:r>
                       <a:endParaRPr lang="en-US" sz="1500" dirty="0">
-                        <a:latin typeface="Meiryo" charset="0"/>
-                        <a:ea typeface="Meiryo" charset="0"/>
-                        <a:cs typeface="Meiryo" charset="0"/>
+                        <a:latin typeface="Yu Gothic Medium" charset="0"/>
+                        <a:ea typeface="Yu Gothic Medium" charset="0"/>
+                        <a:cs typeface="Yu Gothic Medium" charset="0"/>
                       </a:endParaRPr>
                     </a:p>
                   </a:txBody>
@@ -4711,16 +4734,16 @@
                           <a:solidFill>
                             <a:srgbClr val="1B2735"/>
                           </a:solidFill>
-                          <a:latin typeface="Meiryo" pitchFamily="34" charset="0"/>
-                          <a:ea typeface="Meiryo" pitchFamily="34" charset="-122"/>
-                          <a:cs typeface="Meiryo" pitchFamily="34" charset="-120"/>
+                          <a:latin typeface="Yu Gothic Medium" pitchFamily="34" charset="0"/>
+                          <a:ea typeface="Yu Gothic Medium" pitchFamily="34" charset="-122"/>
+                          <a:cs typeface="Yu Gothic Medium" pitchFamily="34" charset="-120"/>
                         </a:rPr>
                         <a:t>2,560</a:t>
                       </a:r>
                       <a:endParaRPr lang="en-US" sz="1500" dirty="0">
-                        <a:latin typeface="Meiryo" charset="0"/>
-                        <a:ea typeface="Meiryo" charset="0"/>
-                        <a:cs typeface="Meiryo" charset="0"/>
+                        <a:latin typeface="Yu Gothic Medium" charset="0"/>
+                        <a:ea typeface="Yu Gothic Medium" charset="0"/>
+                        <a:cs typeface="Yu Gothic Medium" charset="0"/>
                       </a:endParaRPr>
                     </a:p>
                   </a:txBody>
@@ -4779,16 +4802,16 @@
                           <a:solidFill>
                             <a:srgbClr val="1B2735"/>
                           </a:solidFill>
-                          <a:latin typeface="Meiryo" pitchFamily="34" charset="0"/>
-                          <a:ea typeface="Meiryo" pitchFamily="34" charset="-122"/>
-                          <a:cs typeface="Meiryo" pitchFamily="34" charset="-120"/>
+                          <a:latin typeface="Yu Gothic Medium" pitchFamily="34" charset="0"/>
+                          <a:ea typeface="Yu Gothic Medium" pitchFamily="34" charset="-122"/>
+                          <a:cs typeface="Yu Gothic Medium" pitchFamily="34" charset="-120"/>
                         </a:rPr>
                         <a:t>53%</a:t>
                       </a:r>
                       <a:endParaRPr lang="en-US" sz="1500" dirty="0">
-                        <a:latin typeface="Meiryo" charset="0"/>
-                        <a:ea typeface="Meiryo" charset="0"/>
-                        <a:cs typeface="Meiryo" charset="0"/>
+                        <a:latin typeface="Yu Gothic Medium" charset="0"/>
+                        <a:ea typeface="Yu Gothic Medium" charset="0"/>
+                        <a:cs typeface="Yu Gothic Medium" charset="0"/>
                       </a:endParaRPr>
                     </a:p>
                   </a:txBody>
@@ -4847,16 +4870,16 @@
                           <a:solidFill>
                             <a:srgbClr val="1B2735"/>
                           </a:solidFill>
-                          <a:latin typeface="Meiryo" pitchFamily="34" charset="0"/>
-                          <a:ea typeface="Meiryo" pitchFamily="34" charset="-122"/>
-                          <a:cs typeface="Meiryo" pitchFamily="34" charset="-120"/>
+                          <a:latin typeface="Yu Gothic Medium" pitchFamily="34" charset="0"/>
+                          <a:ea typeface="Yu Gothic Medium" pitchFamily="34" charset="-122"/>
+                          <a:cs typeface="Yu Gothic Medium" pitchFamily="34" charset="-120"/>
                         </a:rPr>
                         <a:t>268</a:t>
                       </a:r>
                       <a:endParaRPr lang="en-US" sz="1500" dirty="0">
-                        <a:latin typeface="Meiryo" charset="0"/>
-                        <a:ea typeface="Meiryo" charset="0"/>
-                        <a:cs typeface="Meiryo" charset="0"/>
+                        <a:latin typeface="Yu Gothic Medium" charset="0"/>
+                        <a:ea typeface="Yu Gothic Medium" charset="0"/>
+                        <a:cs typeface="Yu Gothic Medium" charset="0"/>
                       </a:endParaRPr>
                     </a:p>
                   </a:txBody>
@@ -4915,16 +4938,16 @@
                           <a:solidFill>
                             <a:srgbClr val="1B2735"/>
                           </a:solidFill>
-                          <a:latin typeface="Meiryo" pitchFamily="34" charset="0"/>
-                          <a:ea typeface="Meiryo" pitchFamily="34" charset="-122"/>
-                          <a:cs typeface="Meiryo" pitchFamily="34" charset="-120"/>
+                          <a:latin typeface="Yu Gothic Medium" pitchFamily="34" charset="0"/>
+                          <a:ea typeface="Yu Gothic Medium" pitchFamily="34" charset="-122"/>
+                          <a:cs typeface="Yu Gothic Medium" pitchFamily="34" charset="-120"/>
                         </a:rPr>
                         <a:t>10.5%</a:t>
                       </a:r>
                       <a:endParaRPr lang="en-US" sz="1500" dirty="0">
-                        <a:latin typeface="Meiryo" charset="0"/>
-                        <a:ea typeface="Meiryo" charset="0"/>
-                        <a:cs typeface="Meiryo" charset="0"/>
+                        <a:latin typeface="Yu Gothic Medium" charset="0"/>
+                        <a:ea typeface="Yu Gothic Medium" charset="0"/>
+                        <a:cs typeface="Yu Gothic Medium" charset="0"/>
                       </a:endParaRPr>
                     </a:p>
                   </a:txBody>
@@ -4985,16 +5008,16 @@
                           <a:solidFill>
                             <a:srgbClr val="1B2735"/>
                           </a:solidFill>
-                          <a:latin typeface="Meiryo" pitchFamily="34" charset="0"/>
-                          <a:ea typeface="Meiryo" pitchFamily="34" charset="-122"/>
-                          <a:cs typeface="Meiryo" pitchFamily="34" charset="-120"/>
+                          <a:latin typeface="Yu Gothic Medium" pitchFamily="34" charset="0"/>
+                          <a:ea typeface="Yu Gothic Medium" pitchFamily="34" charset="-122"/>
+                          <a:cs typeface="Yu Gothic Medium" pitchFamily="34" charset="-120"/>
                         </a:rPr>
                         <a:t>電子部品</a:t>
                       </a:r>
                       <a:endParaRPr lang="en-US" sz="1500" dirty="0">
-                        <a:latin typeface="Meiryo" charset="0"/>
-                        <a:ea typeface="Meiryo" charset="0"/>
-                        <a:cs typeface="Meiryo" charset="0"/>
+                        <a:latin typeface="Yu Gothic Medium" charset="0"/>
+                        <a:ea typeface="Yu Gothic Medium" charset="0"/>
+                        <a:cs typeface="Yu Gothic Medium" charset="0"/>
                       </a:endParaRPr>
                     </a:p>
                   </a:txBody>
@@ -5053,16 +5076,16 @@
                           <a:solidFill>
                             <a:srgbClr val="1B2735"/>
                           </a:solidFill>
-                          <a:latin typeface="Meiryo" pitchFamily="34" charset="0"/>
-                          <a:ea typeface="Meiryo" pitchFamily="34" charset="-122"/>
-                          <a:cs typeface="Meiryo" pitchFamily="34" charset="-120"/>
+                          <a:latin typeface="Yu Gothic Medium" pitchFamily="34" charset="0"/>
+                          <a:ea typeface="Yu Gothic Medium" pitchFamily="34" charset="-122"/>
+                          <a:cs typeface="Yu Gothic Medium" pitchFamily="34" charset="-120"/>
                         </a:rPr>
                         <a:t>1,540</a:t>
                       </a:r>
                       <a:endParaRPr lang="en-US" sz="1500" dirty="0">
-                        <a:latin typeface="Meiryo" charset="0"/>
-                        <a:ea typeface="Meiryo" charset="0"/>
-                        <a:cs typeface="Meiryo" charset="0"/>
+                        <a:latin typeface="Yu Gothic Medium" charset="0"/>
+                        <a:ea typeface="Yu Gothic Medium" charset="0"/>
+                        <a:cs typeface="Yu Gothic Medium" charset="0"/>
                       </a:endParaRPr>
                     </a:p>
                   </a:txBody>
@@ -5121,16 +5144,16 @@
                           <a:solidFill>
                             <a:srgbClr val="1B2735"/>
                           </a:solidFill>
-                          <a:latin typeface="Meiryo" pitchFamily="34" charset="0"/>
-                          <a:ea typeface="Meiryo" pitchFamily="34" charset="-122"/>
-                          <a:cs typeface="Meiryo" pitchFamily="34" charset="-120"/>
+                          <a:latin typeface="Yu Gothic Medium" pitchFamily="34" charset="0"/>
+                          <a:ea typeface="Yu Gothic Medium" pitchFamily="34" charset="-122"/>
+                          <a:cs typeface="Yu Gothic Medium" pitchFamily="34" charset="-120"/>
                         </a:rPr>
                         <a:t>32%</a:t>
                       </a:r>
                       <a:endParaRPr lang="en-US" sz="1500" dirty="0">
-                        <a:latin typeface="Meiryo" charset="0"/>
-                        <a:ea typeface="Meiryo" charset="0"/>
-                        <a:cs typeface="Meiryo" charset="0"/>
+                        <a:latin typeface="Yu Gothic Medium" charset="0"/>
+                        <a:ea typeface="Yu Gothic Medium" charset="0"/>
+                        <a:cs typeface="Yu Gothic Medium" charset="0"/>
                       </a:endParaRPr>
                     </a:p>
                   </a:txBody>
@@ -5189,16 +5212,16 @@
                           <a:solidFill>
                             <a:srgbClr val="1B2735"/>
                           </a:solidFill>
-                          <a:latin typeface="Meiryo" pitchFamily="34" charset="0"/>
-                          <a:ea typeface="Meiryo" pitchFamily="34" charset="-122"/>
-                          <a:cs typeface="Meiryo" pitchFamily="34" charset="-120"/>
+                          <a:latin typeface="Yu Gothic Medium" pitchFamily="34" charset="0"/>
+                          <a:ea typeface="Yu Gothic Medium" pitchFamily="34" charset="-122"/>
+                          <a:cs typeface="Yu Gothic Medium" pitchFamily="34" charset="-120"/>
                         </a:rPr>
                         <a:t>96</a:t>
                       </a:r>
                       <a:endParaRPr lang="en-US" sz="1500" dirty="0">
-                        <a:latin typeface="Meiryo" charset="0"/>
-                        <a:ea typeface="Meiryo" charset="0"/>
-                        <a:cs typeface="Meiryo" charset="0"/>
+                        <a:latin typeface="Yu Gothic Medium" charset="0"/>
+                        <a:ea typeface="Yu Gothic Medium" charset="0"/>
+                        <a:cs typeface="Yu Gothic Medium" charset="0"/>
                       </a:endParaRPr>
                     </a:p>
                   </a:txBody>
@@ -5257,16 +5280,16 @@
                           <a:solidFill>
                             <a:srgbClr val="1B2735"/>
                           </a:solidFill>
-                          <a:latin typeface="Meiryo" pitchFamily="34" charset="0"/>
-                          <a:ea typeface="Meiryo" pitchFamily="34" charset="-122"/>
-                          <a:cs typeface="Meiryo" pitchFamily="34" charset="-120"/>
+                          <a:latin typeface="Yu Gothic Medium" pitchFamily="34" charset="0"/>
+                          <a:ea typeface="Yu Gothic Medium" pitchFamily="34" charset="-122"/>
+                          <a:cs typeface="Yu Gothic Medium" pitchFamily="34" charset="-120"/>
                         </a:rPr>
                         <a:t>6.2%</a:t>
                       </a:r>
                       <a:endParaRPr lang="en-US" sz="1500" dirty="0">
-                        <a:latin typeface="Meiryo" charset="0"/>
-                        <a:ea typeface="Meiryo" charset="0"/>
-                        <a:cs typeface="Meiryo" charset="0"/>
+                        <a:latin typeface="Yu Gothic Medium" charset="0"/>
+                        <a:ea typeface="Yu Gothic Medium" charset="0"/>
+                        <a:cs typeface="Yu Gothic Medium" charset="0"/>
                       </a:endParaRPr>
                     </a:p>
                   </a:txBody>
@@ -5327,16 +5350,16 @@
                           <a:solidFill>
                             <a:srgbClr val="1B2735"/>
                           </a:solidFill>
-                          <a:latin typeface="Meiryo" pitchFamily="34" charset="0"/>
-                          <a:ea typeface="Meiryo" pitchFamily="34" charset="-122"/>
-                          <a:cs typeface="Meiryo" pitchFamily="34" charset="-120"/>
+                          <a:latin typeface="Yu Gothic Medium" pitchFamily="34" charset="0"/>
+                          <a:ea typeface="Yu Gothic Medium" pitchFamily="34" charset="-122"/>
+                          <a:cs typeface="Yu Gothic Medium" pitchFamily="34" charset="-120"/>
                         </a:rPr>
                         <a:t>保守・サービス</a:t>
                       </a:r>
                       <a:endParaRPr lang="en-US" sz="1500" dirty="0">
-                        <a:latin typeface="Meiryo" charset="0"/>
-                        <a:ea typeface="Meiryo" charset="0"/>
-                        <a:cs typeface="Meiryo" charset="0"/>
+                        <a:latin typeface="Yu Gothic Medium" charset="0"/>
+                        <a:ea typeface="Yu Gothic Medium" charset="0"/>
+                        <a:cs typeface="Yu Gothic Medium" charset="0"/>
                       </a:endParaRPr>
                     </a:p>
                   </a:txBody>
@@ -5395,16 +5418,16 @@
                           <a:solidFill>
                             <a:srgbClr val="1B2735"/>
                           </a:solidFill>
-                          <a:latin typeface="Meiryo" pitchFamily="34" charset="0"/>
-                          <a:ea typeface="Meiryo" pitchFamily="34" charset="-122"/>
-                          <a:cs typeface="Meiryo" pitchFamily="34" charset="-120"/>
+                          <a:latin typeface="Yu Gothic Medium" pitchFamily="34" charset="0"/>
+                          <a:ea typeface="Yu Gothic Medium" pitchFamily="34" charset="-122"/>
+                          <a:cs typeface="Yu Gothic Medium" pitchFamily="34" charset="-120"/>
                         </a:rPr>
                         <a:t>720</a:t>
                       </a:r>
                       <a:endParaRPr lang="en-US" sz="1500" dirty="0">
-                        <a:latin typeface="Meiryo" charset="0"/>
-                        <a:ea typeface="Meiryo" charset="0"/>
-                        <a:cs typeface="Meiryo" charset="0"/>
+                        <a:latin typeface="Yu Gothic Medium" charset="0"/>
+                        <a:ea typeface="Yu Gothic Medium" charset="0"/>
+                        <a:cs typeface="Yu Gothic Medium" charset="0"/>
                       </a:endParaRPr>
                     </a:p>
                   </a:txBody>
@@ -5463,16 +5486,16 @@
                           <a:solidFill>
                             <a:srgbClr val="1B2735"/>
                           </a:solidFill>
-                          <a:latin typeface="Meiryo" pitchFamily="34" charset="0"/>
-                          <a:ea typeface="Meiryo" pitchFamily="34" charset="-122"/>
-                          <a:cs typeface="Meiryo" pitchFamily="34" charset="-120"/>
+                          <a:latin typeface="Yu Gothic Medium" pitchFamily="34" charset="0"/>
+                          <a:ea typeface="Yu Gothic Medium" pitchFamily="34" charset="-122"/>
+                          <a:cs typeface="Yu Gothic Medium" pitchFamily="34" charset="-120"/>
                         </a:rPr>
                         <a:t>15%</a:t>
                       </a:r>
                       <a:endParaRPr lang="en-US" sz="1500" dirty="0">
-                        <a:latin typeface="Meiryo" charset="0"/>
-                        <a:ea typeface="Meiryo" charset="0"/>
-                        <a:cs typeface="Meiryo" charset="0"/>
+                        <a:latin typeface="Yu Gothic Medium" charset="0"/>
+                        <a:ea typeface="Yu Gothic Medium" charset="0"/>
+                        <a:cs typeface="Yu Gothic Medium" charset="0"/>
                       </a:endParaRPr>
                     </a:p>
                   </a:txBody>
@@ -5531,16 +5554,16 @@
                           <a:solidFill>
                             <a:srgbClr val="1B2735"/>
                           </a:solidFill>
-                          <a:latin typeface="Meiryo" pitchFamily="34" charset="0"/>
-                          <a:ea typeface="Meiryo" pitchFamily="34" charset="-122"/>
-                          <a:cs typeface="Meiryo" pitchFamily="34" charset="-120"/>
+                          <a:latin typeface="Yu Gothic Medium" pitchFamily="34" charset="0"/>
+                          <a:ea typeface="Yu Gothic Medium" pitchFamily="34" charset="-122"/>
+                          <a:cs typeface="Yu Gothic Medium" pitchFamily="34" charset="-120"/>
                         </a:rPr>
                         <a:t>41</a:t>
                       </a:r>
                       <a:endParaRPr lang="en-US" sz="1500" dirty="0">
-                        <a:latin typeface="Meiryo" charset="0"/>
-                        <a:ea typeface="Meiryo" charset="0"/>
-                        <a:cs typeface="Meiryo" charset="0"/>
+                        <a:latin typeface="Yu Gothic Medium" charset="0"/>
+                        <a:ea typeface="Yu Gothic Medium" charset="0"/>
+                        <a:cs typeface="Yu Gothic Medium" charset="0"/>
                       </a:endParaRPr>
                     </a:p>
                   </a:txBody>
@@ -5599,16 +5622,16 @@
                           <a:solidFill>
                             <a:srgbClr val="1B2735"/>
                           </a:solidFill>
-                          <a:latin typeface="Meiryo" pitchFamily="34" charset="0"/>
-                          <a:ea typeface="Meiryo" pitchFamily="34" charset="-122"/>
-                          <a:cs typeface="Meiryo" pitchFamily="34" charset="-120"/>
+                          <a:latin typeface="Yu Gothic Medium" pitchFamily="34" charset="0"/>
+                          <a:ea typeface="Yu Gothic Medium" pitchFamily="34" charset="-122"/>
+                          <a:cs typeface="Yu Gothic Medium" pitchFamily="34" charset="-120"/>
                         </a:rPr>
                         <a:t>5.7%</a:t>
                       </a:r>
                       <a:endParaRPr lang="en-US" sz="1500" dirty="0">
-                        <a:latin typeface="Meiryo" charset="0"/>
-                        <a:ea typeface="Meiryo" charset="0"/>
-                        <a:cs typeface="Meiryo" charset="0"/>
+                        <a:latin typeface="Yu Gothic Medium" charset="0"/>
+                        <a:ea typeface="Yu Gothic Medium" charset="0"/>
+                        <a:cs typeface="Yu Gothic Medium" charset="0"/>
                       </a:endParaRPr>
                     </a:p>
                   </a:txBody>
@@ -5669,16 +5692,16 @@
                           <a:solidFill>
                             <a:srgbClr val="1B2735"/>
                           </a:solidFill>
-                          <a:latin typeface="Meiryo" pitchFamily="34" charset="0"/>
-                          <a:ea typeface="Meiryo" pitchFamily="34" charset="-122"/>
-                          <a:cs typeface="Meiryo" pitchFamily="34" charset="-120"/>
+                          <a:latin typeface="Yu Gothic Medium" pitchFamily="34" charset="0"/>
+                          <a:ea typeface="Yu Gothic Medium" pitchFamily="34" charset="-122"/>
+                          <a:cs typeface="Yu Gothic Medium" pitchFamily="34" charset="-120"/>
                         </a:rPr>
                         <a:t>合計</a:t>
                       </a:r>
                       <a:endParaRPr lang="en-US" sz="1500" dirty="0">
-                        <a:latin typeface="Meiryo" charset="0"/>
-                        <a:ea typeface="Meiryo" charset="0"/>
-                        <a:cs typeface="Meiryo" charset="0"/>
+                        <a:latin typeface="Yu Gothic Medium" charset="0"/>
+                        <a:ea typeface="Yu Gothic Medium" charset="0"/>
+                        <a:cs typeface="Yu Gothic Medium" charset="0"/>
                       </a:endParaRPr>
                     </a:p>
                   </a:txBody>
@@ -5737,16 +5760,16 @@
                           <a:solidFill>
                             <a:srgbClr val="1B2735"/>
                           </a:solidFill>
-                          <a:latin typeface="Meiryo" pitchFamily="34" charset="0"/>
-                          <a:ea typeface="Meiryo" pitchFamily="34" charset="-122"/>
-                          <a:cs typeface="Meiryo" pitchFamily="34" charset="-120"/>
+                          <a:latin typeface="Yu Gothic Medium" pitchFamily="34" charset="0"/>
+                          <a:ea typeface="Yu Gothic Medium" pitchFamily="34" charset="-122"/>
+                          <a:cs typeface="Yu Gothic Medium" pitchFamily="34" charset="-120"/>
                         </a:rPr>
                         <a:t>4,820</a:t>
                       </a:r>
                       <a:endParaRPr lang="en-US" sz="1500" dirty="0">
-                        <a:latin typeface="Meiryo" charset="0"/>
-                        <a:ea typeface="Meiryo" charset="0"/>
-                        <a:cs typeface="Meiryo" charset="0"/>
+                        <a:latin typeface="Yu Gothic Medium" charset="0"/>
+                        <a:ea typeface="Yu Gothic Medium" charset="0"/>
+                        <a:cs typeface="Yu Gothic Medium" charset="0"/>
                       </a:endParaRPr>
                     </a:p>
                   </a:txBody>
@@ -5805,16 +5828,16 @@
                           <a:solidFill>
                             <a:srgbClr val="1B2735"/>
                           </a:solidFill>
-                          <a:latin typeface="Meiryo" pitchFamily="34" charset="0"/>
-                          <a:ea typeface="Meiryo" pitchFamily="34" charset="-122"/>
-                          <a:cs typeface="Meiryo" pitchFamily="34" charset="-120"/>
+                          <a:latin typeface="Yu Gothic Medium" pitchFamily="34" charset="0"/>
+                          <a:ea typeface="Yu Gothic Medium" pitchFamily="34" charset="-122"/>
+                          <a:cs typeface="Yu Gothic Medium" pitchFamily="34" charset="-120"/>
                         </a:rPr>
                         <a:t>100%</a:t>
                       </a:r>
                       <a:endParaRPr lang="en-US" sz="1500" dirty="0">
-                        <a:latin typeface="Meiryo" charset="0"/>
-                        <a:ea typeface="Meiryo" charset="0"/>
-                        <a:cs typeface="Meiryo" charset="0"/>
+                        <a:latin typeface="Yu Gothic Medium" charset="0"/>
+                        <a:ea typeface="Yu Gothic Medium" charset="0"/>
+                        <a:cs typeface="Yu Gothic Medium" charset="0"/>
                       </a:endParaRPr>
                     </a:p>
                   </a:txBody>
@@ -5873,16 +5896,16 @@
                           <a:solidFill>
                             <a:srgbClr val="1B2735"/>
                           </a:solidFill>
-                          <a:latin typeface="Meiryo" pitchFamily="34" charset="0"/>
-                          <a:ea typeface="Meiryo" pitchFamily="34" charset="-122"/>
-                          <a:cs typeface="Meiryo" pitchFamily="34" charset="-120"/>
+                          <a:latin typeface="Yu Gothic Medium" pitchFamily="34" charset="0"/>
+                          <a:ea typeface="Yu Gothic Medium" pitchFamily="34" charset="-122"/>
+                          <a:cs typeface="Yu Gothic Medium" pitchFamily="34" charset="-120"/>
                         </a:rPr>
                         <a:t>405</a:t>
                       </a:r>
                       <a:endParaRPr lang="en-US" sz="1500" dirty="0">
-                        <a:latin typeface="Meiryo" charset="0"/>
-                        <a:ea typeface="Meiryo" charset="0"/>
-                        <a:cs typeface="Meiryo" charset="0"/>
+                        <a:latin typeface="Yu Gothic Medium" charset="0"/>
+                        <a:ea typeface="Yu Gothic Medium" charset="0"/>
+                        <a:cs typeface="Yu Gothic Medium" charset="0"/>
                       </a:endParaRPr>
                     </a:p>
                   </a:txBody>
@@ -5941,16 +5964,16 @@
                           <a:solidFill>
                             <a:srgbClr val="1B2735"/>
                           </a:solidFill>
-                          <a:latin typeface="Meiryo" pitchFamily="34" charset="0"/>
-                          <a:ea typeface="Meiryo" pitchFamily="34" charset="-122"/>
-                          <a:cs typeface="Meiryo" pitchFamily="34" charset="-120"/>
+                          <a:latin typeface="Yu Gothic Medium" pitchFamily="34" charset="0"/>
+                          <a:ea typeface="Yu Gothic Medium" pitchFamily="34" charset="-122"/>
+                          <a:cs typeface="Yu Gothic Medium" pitchFamily="34" charset="-120"/>
                         </a:rPr>
                         <a:t>8.4%</a:t>
                       </a:r>
                       <a:endParaRPr lang="en-US" sz="1500" dirty="0">
-                        <a:latin typeface="Meiryo" charset="0"/>
-                        <a:ea typeface="Meiryo" charset="0"/>
-                        <a:cs typeface="Meiryo" charset="0"/>
+                        <a:latin typeface="Yu Gothic Medium" charset="0"/>
+                        <a:ea typeface="Yu Gothic Medium" charset="0"/>
+                        <a:cs typeface="Yu Gothic Medium" charset="0"/>
                       </a:endParaRPr>
                     </a:p>
                   </a:txBody>
@@ -6009,8 +6032,8 @@
         </p:nvSpPr>
         <p:spPr>
           <a:xfrm>
-            <a:off x="640080" y="6053328"/>
-            <a:ext cx="10911535" cy="292608"/>
+            <a:off x="685800" y="6053328"/>
+            <a:ext cx="10820095" cy="292608"/>
           </a:xfrm>
           <a:prstGeom prst="rect">
             <a:avLst/>
@@ -6026,17 +6049,17 @@
               <a:buNone/>
             </a:pPr>
             <a:r>
-              <a:rPr lang="en-US" sz="1100" dirty="0">
+              <a:rPr lang="en-US" sz="1200" dirty="0">
                 <a:solidFill>
                   <a:srgbClr val="8A98A6"/>
                 </a:solidFill>
-                <a:latin typeface="Meiryo" pitchFamily="34" charset="0"/>
-                <a:ea typeface="Meiryo" pitchFamily="34" charset="-122"/>
-                <a:cs typeface="Meiryo" pitchFamily="34" charset="-120"/>
+                <a:latin typeface="Yu Gothic" pitchFamily="34" charset="0"/>
+                <a:ea typeface="Yu Gothic" pitchFamily="34" charset="-122"/>
+                <a:cs typeface="Yu Gothic" pitchFamily="34" charset="-120"/>
               </a:rPr>
               <a:t>単位：百万円（上期実績、社内管理ベース）。営業利益はセグメント間配賦後。構成比は四捨五入のため合計が100%にならない場合があります。</a:t>
             </a:r>
-            <a:endParaRPr lang="en-US" sz="1100" dirty="0"/>
+            <a:endParaRPr lang="en-US" sz="1200" dirty="0"/>
           </a:p>
         </p:txBody>
       </p:sp>
@@ -6048,7 +6071,7 @@
         </p:nvSpPr>
         <p:spPr>
           <a:xfrm>
-            <a:off x="640080" y="6473952"/>
+            <a:off x="685800" y="6473952"/>
             <a:ext cx="2743200" cy="274320"/>
           </a:xfrm>
           <a:prstGeom prst="rect">
@@ -6065,17 +6088,17 @@
               <a:buNone/>
             </a:pPr>
             <a:r>
-              <a:rPr lang="en-US" sz="1100" dirty="0">
+              <a:rPr lang="en-US" sz="1200" dirty="0">
                 <a:solidFill>
                   <a:srgbClr val="8A98A6"/>
                 </a:solidFill>
-                <a:latin typeface="Meiryo" pitchFamily="34" charset="0"/>
-                <a:ea typeface="Meiryo" pitchFamily="34" charset="-122"/>
-                <a:cs typeface="Meiryo" pitchFamily="34" charset="-120"/>
+                <a:latin typeface="Yu Gothic" pitchFamily="34" charset="0"/>
+                <a:ea typeface="Yu Gothic" pitchFamily="34" charset="-122"/>
+                <a:cs typeface="Yu Gothic" pitchFamily="34" charset="-120"/>
               </a:rPr>
               <a:t>サンプル製造</a:t>
             </a:r>
-            <a:endParaRPr lang="en-US" sz="1100" dirty="0"/>
+            <a:endParaRPr lang="en-US" sz="1200" dirty="0"/>
           </a:p>
         </p:txBody>
       </p:sp>
@@ -6087,7 +6110,7 @@
         </p:nvSpPr>
         <p:spPr>
           <a:xfrm>
-            <a:off x="10637215" y="6473952"/>
+            <a:off x="10591495" y="6473952"/>
             <a:ext cx="914400" cy="274320"/>
           </a:xfrm>
           <a:prstGeom prst="rect">
@@ -6104,17 +6127,17 @@
               <a:buNone/>
             </a:pPr>
             <a:r>
-              <a:rPr lang="en-US" sz="1100" dirty="0">
+              <a:rPr lang="en-US" sz="1200" dirty="0">
                 <a:solidFill>
                   <a:srgbClr val="8A98A6"/>
                 </a:solidFill>
-                <a:latin typeface="Meiryo" pitchFamily="34" charset="0"/>
-                <a:ea typeface="Meiryo" pitchFamily="34" charset="-122"/>
-                <a:cs typeface="Meiryo" pitchFamily="34" charset="-120"/>
+                <a:latin typeface="Yu Gothic" pitchFamily="34" charset="0"/>
+                <a:ea typeface="Yu Gothic" pitchFamily="34" charset="-122"/>
+                <a:cs typeface="Yu Gothic" pitchFamily="34" charset="-120"/>
               </a:rPr>
               <a:t>6</a:t>
             </a:r>
-            <a:endParaRPr lang="en-US" sz="1100" dirty="0"/>
+            <a:endParaRPr lang="en-US" sz="1200" dirty="0"/>
           </a:p>
         </p:txBody>
       </p:sp>
@@ -6158,7 +6181,7 @@
         </p:nvSpPr>
         <p:spPr>
           <a:xfrm>
-            <a:off x="640080" y="690372"/>
+            <a:off x="685800" y="736092"/>
             <a:ext cx="118872" cy="118872"/>
           </a:xfrm>
           <a:prstGeom prst="ellipse">
@@ -6178,7 +6201,7 @@
         </p:nvSpPr>
         <p:spPr>
           <a:xfrm>
-            <a:off x="877824" y="640080"/>
+            <a:off x="923544" y="685800"/>
             <a:ext cx="7315200" cy="274320"/>
           </a:xfrm>
           <a:prstGeom prst="rect">
@@ -6195,17 +6218,17 @@
               <a:buNone/>
             </a:pPr>
             <a:r>
-              <a:rPr lang="en-US" sz="1250" b="1" spc="100" kern="0" dirty="0">
+              <a:rPr lang="en-US" sz="1200" b="1" spc="150" kern="0" dirty="0">
                 <a:solidFill>
                   <a:srgbClr val="0E7C86"/>
                 </a:solidFill>
-                <a:latin typeface="Meiryo" pitchFamily="34" charset="0"/>
-                <a:ea typeface="Meiryo" pitchFamily="34" charset="-122"/>
-                <a:cs typeface="Meiryo" pitchFamily="34" charset="-120"/>
+                <a:latin typeface="Yu Gothic" pitchFamily="34" charset="0"/>
+                <a:ea typeface="Yu Gothic" pitchFamily="34" charset="-122"/>
+                <a:cs typeface="Yu Gothic" pitchFamily="34" charset="-120"/>
               </a:rPr>
               <a:t>下期に向けた論点</a:t>
             </a:r>
-            <a:endParaRPr lang="en-US" sz="1250" dirty="0"/>
+            <a:endParaRPr lang="en-US" sz="1200" dirty="0"/>
           </a:p>
         </p:txBody>
       </p:sp>
@@ -6217,8 +6240,8 @@
         </p:nvSpPr>
         <p:spPr>
           <a:xfrm>
-            <a:off x="640080" y="1051560"/>
-            <a:ext cx="10911535" cy="868680"/>
+            <a:off x="685800" y="1051560"/>
+            <a:ext cx="10820095" cy="841248"/>
           </a:xfrm>
           <a:prstGeom prst="rect">
             <a:avLst/>
@@ -6232,22 +6255,22 @@
           <a:p>
             <a:pPr algn="l" indent="0" marL="0">
               <a:lnSpc>
-                <a:spcPct val="112000"/>
+                <a:spcPct val="108000"/>
               </a:lnSpc>
               <a:buNone/>
             </a:pPr>
             <a:r>
-              <a:rPr lang="en-US" sz="2800" b="1" dirty="0">
+              <a:rPr lang="en-US" sz="3000" b="1" spc="-20" kern="0" dirty="0">
                 <a:solidFill>
                   <a:srgbClr val="1B2735"/>
                 </a:solidFill>
-                <a:latin typeface="Meiryo" pitchFamily="34" charset="0"/>
-                <a:ea typeface="Meiryo" pitchFamily="34" charset="-122"/>
-                <a:cs typeface="Meiryo" pitchFamily="34" charset="-120"/>
+                <a:latin typeface="Yu Gothic" pitchFamily="34" charset="0"/>
+                <a:ea typeface="Yu Gothic" pitchFamily="34" charset="-122"/>
+                <a:cs typeface="Yu Gothic" pitchFamily="34" charset="-120"/>
               </a:rPr>
               <a:t>順調な領域と、要注意の領域</a:t>
             </a:r>
-            <a:endParaRPr lang="en-US" sz="2800" dirty="0"/>
+            <a:endParaRPr lang="en-US" sz="3000" dirty="0"/>
           </a:p>
         </p:txBody>
       </p:sp>
@@ -6259,12 +6282,12 @@
         </p:nvSpPr>
         <p:spPr>
           <a:xfrm>
-            <a:off x="640080" y="2240280"/>
-            <a:ext cx="5227168" cy="3703320"/>
+            <a:off x="685800" y="2286000"/>
+            <a:ext cx="5181448" cy="3611880"/>
           </a:xfrm>
           <a:prstGeom prst="roundRect">
             <a:avLst>
-              <a:gd name="adj" fmla="val 2222"/>
+              <a:gd name="adj" fmla="val 2532"/>
             </a:avLst>
           </a:prstGeom>
           <a:solidFill>
@@ -6274,7 +6297,7 @@
           <a:effectLst>
             <a:outerShdw sx="100000" sy="100000" kx="0" ky="0" algn="bl" rotWithShape="0" blurRad="127000" dist="50800" dir="5400000">
               <a:srgbClr val="1B2735">
-                <a:alpha val="12000"/>
+                <a:alpha val="10000"/>
               </a:srgbClr>
             </a:outerShdw>
           </a:effectLst>
@@ -6288,12 +6311,12 @@
         </p:nvSpPr>
         <p:spPr>
           <a:xfrm>
-            <a:off x="6324448" y="2240280"/>
-            <a:ext cx="5227168" cy="3703320"/>
+            <a:off x="6324448" y="2286000"/>
+            <a:ext cx="5181448" cy="3611880"/>
           </a:xfrm>
           <a:prstGeom prst="roundRect">
             <a:avLst>
-              <a:gd name="adj" fmla="val 2222"/>
+              <a:gd name="adj" fmla="val 2532"/>
             </a:avLst>
           </a:prstGeom>
           <a:solidFill>
@@ -6303,7 +6326,7 @@
           <a:effectLst>
             <a:outerShdw sx="100000" sy="100000" kx="0" ky="0" algn="bl" rotWithShape="0" blurRad="127000" dist="50800" dir="5400000">
               <a:srgbClr val="1B2735">
-                <a:alpha val="12000"/>
+                <a:alpha val="10000"/>
               </a:srgbClr>
             </a:outerShdw>
           </a:effectLst>
@@ -6317,8 +6340,8 @@
         </p:nvSpPr>
         <p:spPr>
           <a:xfrm>
-            <a:off x="1051560" y="2606040"/>
-            <a:ext cx="4404208" cy="457200"/>
+            <a:off x="1143000" y="2670048"/>
+            <a:ext cx="4267048" cy="457200"/>
           </a:xfrm>
           <a:prstGeom prst="rect">
             <a:avLst/>
@@ -6334,17 +6357,17 @@
               <a:buNone/>
             </a:pPr>
             <a:r>
-              <a:rPr lang="en-US" sz="2200" b="1" dirty="0">
+              <a:rPr lang="en-US" sz="2300" b="1" dirty="0">
                 <a:solidFill>
                   <a:srgbClr val="1B2735"/>
                 </a:solidFill>
-                <a:latin typeface="Meiryo" pitchFamily="34" charset="0"/>
-                <a:ea typeface="Meiryo" pitchFamily="34" charset="-122"/>
-                <a:cs typeface="Meiryo" pitchFamily="34" charset="-120"/>
+                <a:latin typeface="Yu Gothic" pitchFamily="34" charset="0"/>
+                <a:ea typeface="Yu Gothic" pitchFamily="34" charset="-122"/>
+                <a:cs typeface="Yu Gothic" pitchFamily="34" charset="-120"/>
               </a:rPr>
               <a:t>順調な領域</a:t>
             </a:r>
-            <a:endParaRPr lang="en-US" sz="2200" dirty="0"/>
+            <a:endParaRPr lang="en-US" sz="2300" dirty="0"/>
           </a:p>
         </p:txBody>
       </p:sp>
@@ -6356,8 +6379,8 @@
         </p:nvSpPr>
         <p:spPr>
           <a:xfrm>
-            <a:off x="1051560" y="3108960"/>
-            <a:ext cx="4404208" cy="320040"/>
+            <a:off x="1143000" y="3182112"/>
+            <a:ext cx="4267048" cy="320040"/>
           </a:xfrm>
           <a:prstGeom prst="rect">
             <a:avLst/>
@@ -6373,17 +6396,17 @@
               <a:buNone/>
             </a:pPr>
             <a:r>
-              <a:rPr lang="en-US" sz="1300" dirty="0">
+              <a:rPr lang="en-US" sz="1350" dirty="0">
                 <a:solidFill>
                   <a:srgbClr val="566373"/>
                 </a:solidFill>
-                <a:latin typeface="Meiryo" pitchFamily="34" charset="0"/>
-                <a:ea typeface="Meiryo" pitchFamily="34" charset="-122"/>
-                <a:cs typeface="Meiryo" pitchFamily="34" charset="-120"/>
+                <a:latin typeface="Yu Gothic Medium" pitchFamily="34" charset="0"/>
+                <a:ea typeface="Yu Gothic Medium" pitchFamily="34" charset="-122"/>
+                <a:cs typeface="Yu Gothic Medium" pitchFamily="34" charset="-120"/>
               </a:rPr>
               <a:t>上期の伸びを支えた要因</a:t>
             </a:r>
-            <a:endParaRPr lang="en-US" sz="1300" dirty="0"/>
+            <a:endParaRPr lang="en-US" sz="1350" dirty="0"/>
           </a:p>
         </p:txBody>
       </p:sp>
@@ -6395,8 +6418,8 @@
         </p:nvSpPr>
         <p:spPr>
           <a:xfrm>
-            <a:off x="1051560" y="3611880"/>
-            <a:ext cx="4404208" cy="1965960"/>
+            <a:off x="1143000" y="3703320"/>
+            <a:ext cx="4267048" cy="1874520"/>
           </a:xfrm>
           <a:prstGeom prst="rect">
             <a:avLst/>
@@ -6409,8 +6432,11 @@
           <a:lstStyle/>
           <a:p>
             <a:pPr algn="l" marL="177800" indent="-177800">
+              <a:lnSpc>
+                <a:spcPct val="140000"/>
+              </a:lnSpc>
               <a:spcAft>
-                <a:spcPts val="1000"/>
+                <a:spcPts val="1100"/>
               </a:spcAft>
               <a:buSzPct val="100000"/>
               <a:buChar char="•"/>
@@ -6420,9 +6446,9 @@
                 <a:solidFill>
                   <a:srgbClr val="1B2735"/>
                 </a:solidFill>
-                <a:latin typeface="Meiryo" pitchFamily="34" charset="0"/>
-                <a:ea typeface="Meiryo" pitchFamily="34" charset="-122"/>
-                <a:cs typeface="Meiryo" pitchFamily="34" charset="-120"/>
+                <a:latin typeface="Yu Gothic Medium" pitchFamily="34" charset="0"/>
+                <a:ea typeface="Yu Gothic Medium" pitchFamily="34" charset="-122"/>
+                <a:cs typeface="Yu Gothic Medium" pitchFamily="34" charset="-120"/>
               </a:rPr>
               <a:t>産業機械の受注増（大型案件）</a:t>
             </a:r>
@@ -6430,8 +6456,11 @@
           </a:p>
           <a:p>
             <a:pPr algn="l" marL="177800" indent="-177800">
+              <a:lnSpc>
+                <a:spcPct val="140000"/>
+              </a:lnSpc>
               <a:spcAft>
-                <a:spcPts val="1000"/>
+                <a:spcPts val="1100"/>
               </a:spcAft>
               <a:buSzPct val="100000"/>
               <a:buChar char="•"/>
@@ -6441,9 +6470,9 @@
                 <a:solidFill>
                   <a:srgbClr val="1B2735"/>
                 </a:solidFill>
-                <a:latin typeface="Meiryo" pitchFamily="34" charset="0"/>
-                <a:ea typeface="Meiryo" pitchFamily="34" charset="-122"/>
-                <a:cs typeface="Meiryo" pitchFamily="34" charset="-120"/>
+                <a:latin typeface="Yu Gothic Medium" pitchFamily="34" charset="0"/>
+                <a:ea typeface="Yu Gothic Medium" pitchFamily="34" charset="-122"/>
+                <a:cs typeface="Yu Gothic Medium" pitchFamily="34" charset="-120"/>
               </a:rPr>
               <a:t>保守・サービス売上の安定</a:t>
             </a:r>
@@ -6451,8 +6480,11 @@
           </a:p>
           <a:p>
             <a:pPr algn="l" marL="177800" indent="-177800">
+              <a:lnSpc>
+                <a:spcPct val="140000"/>
+              </a:lnSpc>
               <a:spcAft>
-                <a:spcPts val="1000"/>
+                <a:spcPts val="1100"/>
               </a:spcAft>
               <a:buSzPct val="100000"/>
               <a:buChar char="•"/>
@@ -6462,9 +6494,9 @@
                 <a:solidFill>
                   <a:srgbClr val="1B2735"/>
                 </a:solidFill>
-                <a:latin typeface="Meiryo" pitchFamily="34" charset="0"/>
-                <a:ea typeface="Meiryo" pitchFamily="34" charset="-122"/>
-                <a:cs typeface="Meiryo" pitchFamily="34" charset="-120"/>
+                <a:latin typeface="Yu Gothic Medium" pitchFamily="34" charset="0"/>
+                <a:ea typeface="Yu Gothic Medium" pitchFamily="34" charset="-122"/>
+                <a:cs typeface="Yu Gothic Medium" pitchFamily="34" charset="-120"/>
               </a:rPr>
               <a:t>価格改定の浸透が進んだ</a:t>
             </a:r>
@@ -6480,8 +6512,8 @@
         </p:nvSpPr>
         <p:spPr>
           <a:xfrm>
-            <a:off x="6735928" y="2606040"/>
-            <a:ext cx="4404208" cy="457200"/>
+            <a:off x="6781648" y="2670048"/>
+            <a:ext cx="4267048" cy="457200"/>
           </a:xfrm>
           <a:prstGeom prst="rect">
             <a:avLst/>
@@ -6497,17 +6529,17 @@
               <a:buNone/>
             </a:pPr>
             <a:r>
-              <a:rPr lang="en-US" sz="2200" b="1" dirty="0">
+              <a:rPr lang="en-US" sz="2300" b="1" dirty="0">
                 <a:solidFill>
                   <a:srgbClr val="0A5E66"/>
                 </a:solidFill>
-                <a:latin typeface="Meiryo" pitchFamily="34" charset="0"/>
-                <a:ea typeface="Meiryo" pitchFamily="34" charset="-122"/>
-                <a:cs typeface="Meiryo" pitchFamily="34" charset="-120"/>
+                <a:latin typeface="Yu Gothic" pitchFamily="34" charset="0"/>
+                <a:ea typeface="Yu Gothic" pitchFamily="34" charset="-122"/>
+                <a:cs typeface="Yu Gothic" pitchFamily="34" charset="-120"/>
               </a:rPr>
               <a:t>要注意の領域</a:t>
             </a:r>
-            <a:endParaRPr lang="en-US" sz="2200" dirty="0"/>
+            <a:endParaRPr lang="en-US" sz="2300" dirty="0"/>
           </a:p>
         </p:txBody>
       </p:sp>
@@ -6519,8 +6551,8 @@
         </p:nvSpPr>
         <p:spPr>
           <a:xfrm>
-            <a:off x="6735928" y="3108960"/>
-            <a:ext cx="4404208" cy="320040"/>
+            <a:off x="6781648" y="3182112"/>
+            <a:ext cx="4267048" cy="320040"/>
           </a:xfrm>
           <a:prstGeom prst="rect">
             <a:avLst/>
@@ -6536,17 +6568,17 @@
               <a:buNone/>
             </a:pPr>
             <a:r>
-              <a:rPr lang="en-US" sz="1300" dirty="0">
+              <a:rPr lang="en-US" sz="1350" dirty="0">
                 <a:solidFill>
                   <a:srgbClr val="566373"/>
                 </a:solidFill>
-                <a:latin typeface="Meiryo" pitchFamily="34" charset="0"/>
-                <a:ea typeface="Meiryo" pitchFamily="34" charset="-122"/>
-                <a:cs typeface="Meiryo" pitchFamily="34" charset="-120"/>
+                <a:latin typeface="Yu Gothic Medium" pitchFamily="34" charset="0"/>
+                <a:ea typeface="Yu Gothic Medium" pitchFamily="34" charset="-122"/>
+                <a:cs typeface="Yu Gothic Medium" pitchFamily="34" charset="-120"/>
               </a:rPr>
               <a:t>下期に利益を圧迫しうる要因</a:t>
             </a:r>
-            <a:endParaRPr lang="en-US" sz="1300" dirty="0"/>
+            <a:endParaRPr lang="en-US" sz="1350" dirty="0"/>
           </a:p>
         </p:txBody>
       </p:sp>
@@ -6558,8 +6590,8 @@
         </p:nvSpPr>
         <p:spPr>
           <a:xfrm>
-            <a:off x="6735928" y="3611880"/>
-            <a:ext cx="4404208" cy="1965960"/>
+            <a:off x="6781648" y="3703320"/>
+            <a:ext cx="4267048" cy="1874520"/>
           </a:xfrm>
           <a:prstGeom prst="rect">
             <a:avLst/>
@@ -6572,8 +6604,11 @@
           <a:lstStyle/>
           <a:p>
             <a:pPr algn="l" marL="177800" indent="-177800">
+              <a:lnSpc>
+                <a:spcPct val="140000"/>
+              </a:lnSpc>
               <a:spcAft>
-                <a:spcPts val="1000"/>
+                <a:spcPts val="1100"/>
               </a:spcAft>
               <a:buSzPct val="100000"/>
               <a:buChar char="•"/>
@@ -6583,9 +6618,9 @@
                 <a:solidFill>
                   <a:srgbClr val="1B2735"/>
                 </a:solidFill>
-                <a:latin typeface="Meiryo" pitchFamily="34" charset="0"/>
-                <a:ea typeface="Meiryo" pitchFamily="34" charset="-122"/>
-                <a:cs typeface="Meiryo" pitchFamily="34" charset="-120"/>
+                <a:latin typeface="Yu Gothic Medium" pitchFamily="34" charset="0"/>
+                <a:ea typeface="Yu Gothic Medium" pitchFamily="34" charset="-122"/>
+                <a:cs typeface="Yu Gothic Medium" pitchFamily="34" charset="-120"/>
               </a:rPr>
               <a:t>電子部品の部材原価上昇</a:t>
             </a:r>
@@ -6593,8 +6628,11 @@
           </a:p>
           <a:p>
             <a:pPr algn="l" marL="177800" indent="-177800">
+              <a:lnSpc>
+                <a:spcPct val="140000"/>
+              </a:lnSpc>
               <a:spcAft>
-                <a:spcPts val="1000"/>
+                <a:spcPts val="1100"/>
               </a:spcAft>
               <a:buSzPct val="100000"/>
               <a:buChar char="•"/>
@@ -6604,9 +6642,9 @@
                 <a:solidFill>
                   <a:srgbClr val="1B2735"/>
                 </a:solidFill>
-                <a:latin typeface="Meiryo" pitchFamily="34" charset="0"/>
-                <a:ea typeface="Meiryo" pitchFamily="34" charset="-122"/>
-                <a:cs typeface="Meiryo" pitchFamily="34" charset="-120"/>
+                <a:latin typeface="Yu Gothic Medium" pitchFamily="34" charset="0"/>
+                <a:ea typeface="Yu Gothic Medium" pitchFamily="34" charset="-122"/>
+                <a:cs typeface="Yu Gothic Medium" pitchFamily="34" charset="-120"/>
               </a:rPr>
               <a:t>為替（円安）の調達コスト影響</a:t>
             </a:r>
@@ -6614,8 +6652,11 @@
           </a:p>
           <a:p>
             <a:pPr algn="l" marL="177800" indent="-177800">
+              <a:lnSpc>
+                <a:spcPct val="140000"/>
+              </a:lnSpc>
               <a:spcAft>
-                <a:spcPts val="1000"/>
+                <a:spcPts val="1100"/>
               </a:spcAft>
               <a:buSzPct val="100000"/>
               <a:buChar char="•"/>
@@ -6625,9 +6666,9 @@
                 <a:solidFill>
                   <a:srgbClr val="1B2735"/>
                 </a:solidFill>
-                <a:latin typeface="Meiryo" pitchFamily="34" charset="0"/>
-                <a:ea typeface="Meiryo" pitchFamily="34" charset="-122"/>
-                <a:cs typeface="Meiryo" pitchFamily="34" charset="-120"/>
+                <a:latin typeface="Yu Gothic Medium" pitchFamily="34" charset="0"/>
+                <a:ea typeface="Yu Gothic Medium" pitchFamily="34" charset="-122"/>
+                <a:cs typeface="Yu Gothic Medium" pitchFamily="34" charset="-120"/>
               </a:rPr>
               <a:t>人件費・採用費の増加</a:t>
             </a:r>
@@ -6643,7 +6684,7 @@
         </p:nvSpPr>
         <p:spPr>
           <a:xfrm>
-            <a:off x="640080" y="6473952"/>
+            <a:off x="685800" y="6473952"/>
             <a:ext cx="2743200" cy="274320"/>
           </a:xfrm>
           <a:prstGeom prst="rect">
@@ -6660,17 +6701,17 @@
               <a:buNone/>
             </a:pPr>
             <a:r>
-              <a:rPr lang="en-US" sz="1100" dirty="0">
+              <a:rPr lang="en-US" sz="1200" dirty="0">
                 <a:solidFill>
                   <a:srgbClr val="8A98A6"/>
                 </a:solidFill>
-                <a:latin typeface="Meiryo" pitchFamily="34" charset="0"/>
-                <a:ea typeface="Meiryo" pitchFamily="34" charset="-122"/>
-                <a:cs typeface="Meiryo" pitchFamily="34" charset="-120"/>
+                <a:latin typeface="Yu Gothic" pitchFamily="34" charset="0"/>
+                <a:ea typeface="Yu Gothic" pitchFamily="34" charset="-122"/>
+                <a:cs typeface="Yu Gothic" pitchFamily="34" charset="-120"/>
               </a:rPr>
               <a:t>サンプル製造</a:t>
             </a:r>
-            <a:endParaRPr lang="en-US" sz="1100" dirty="0"/>
+            <a:endParaRPr lang="en-US" sz="1200" dirty="0"/>
           </a:p>
         </p:txBody>
       </p:sp>
@@ -6682,7 +6723,7 @@
         </p:nvSpPr>
         <p:spPr>
           <a:xfrm>
-            <a:off x="10637215" y="6473952"/>
+            <a:off x="10591495" y="6473952"/>
             <a:ext cx="914400" cy="274320"/>
           </a:xfrm>
           <a:prstGeom prst="rect">
@@ -6699,17 +6740,17 @@
               <a:buNone/>
             </a:pPr>
             <a:r>
-              <a:rPr lang="en-US" sz="1100" dirty="0">
+              <a:rPr lang="en-US" sz="1200" dirty="0">
                 <a:solidFill>
                   <a:srgbClr val="8A98A6"/>
                 </a:solidFill>
-                <a:latin typeface="Meiryo" pitchFamily="34" charset="0"/>
-                <a:ea typeface="Meiryo" pitchFamily="34" charset="-122"/>
-                <a:cs typeface="Meiryo" pitchFamily="34" charset="-120"/>
+                <a:latin typeface="Yu Gothic" pitchFamily="34" charset="0"/>
+                <a:ea typeface="Yu Gothic" pitchFamily="34" charset="-122"/>
+                <a:cs typeface="Yu Gothic" pitchFamily="34" charset="-120"/>
               </a:rPr>
               <a:t>7</a:t>
             </a:r>
-            <a:endParaRPr lang="en-US" sz="1100" dirty="0"/>
+            <a:endParaRPr lang="en-US" sz="1200" dirty="0"/>
           </a:p>
         </p:txBody>
       </p:sp>
@@ -6754,7 +6795,7 @@
         <p:spPr>
           <a:xfrm>
             <a:off x="7680960" y="1097280"/>
-            <a:ext cx="3870655" cy="4663440"/>
+            <a:ext cx="3824935" cy="4663440"/>
           </a:xfrm>
           <a:prstGeom prst="rect">
             <a:avLst/>
@@ -6774,9 +6815,9 @@
                 <a:solidFill>
                   <a:srgbClr val="26384C"/>
                 </a:solidFill>
-                <a:latin typeface="Meiryo" pitchFamily="34" charset="0"/>
-                <a:ea typeface="Meiryo" pitchFamily="34" charset="-122"/>
-                <a:cs typeface="Meiryo" pitchFamily="34" charset="-120"/>
+                <a:latin typeface="Yu Gothic" pitchFamily="34" charset="0"/>
+                <a:ea typeface="Yu Gothic" pitchFamily="34" charset="-122"/>
+                <a:cs typeface="Yu Gothic" pitchFamily="34" charset="-120"/>
               </a:rPr>
               <a:t>02</a:t>
             </a:r>
@@ -6792,7 +6833,7 @@
         </p:nvSpPr>
         <p:spPr>
           <a:xfrm>
-            <a:off x="640080" y="2747772"/>
+            <a:off x="685800" y="2747772"/>
             <a:ext cx="118872" cy="118872"/>
           </a:xfrm>
           <a:prstGeom prst="ellipse">
@@ -6812,7 +6853,7 @@
         </p:nvSpPr>
         <p:spPr>
           <a:xfrm>
-            <a:off x="877824" y="2697480"/>
+            <a:off x="923544" y="2697480"/>
             <a:ext cx="7315200" cy="274320"/>
           </a:xfrm>
           <a:prstGeom prst="rect">
@@ -6829,17 +6870,17 @@
               <a:buNone/>
             </a:pPr>
             <a:r>
-              <a:rPr lang="en-US" sz="1250" b="1" spc="100" kern="0" dirty="0">
+              <a:rPr lang="en-US" sz="1200" b="1" spc="150" kern="0" dirty="0">
                 <a:solidFill>
                   <a:srgbClr val="5FA8AE"/>
                 </a:solidFill>
-                <a:latin typeface="Meiryo" pitchFamily="34" charset="0"/>
-                <a:ea typeface="Meiryo" pitchFamily="34" charset="-122"/>
-                <a:cs typeface="Meiryo" pitchFamily="34" charset="-120"/>
+                <a:latin typeface="Yu Gothic" pitchFamily="34" charset="0"/>
+                <a:ea typeface="Yu Gothic" pitchFamily="34" charset="-122"/>
+                <a:cs typeface="Yu Gothic" pitchFamily="34" charset="-120"/>
               </a:rPr>
               <a:t>下期に向けて</a:t>
             </a:r>
-            <a:endParaRPr lang="en-US" sz="1250" dirty="0"/>
+            <a:endParaRPr lang="en-US" sz="1200" dirty="0"/>
           </a:p>
         </p:txBody>
       </p:sp>
@@ -6851,8 +6892,8 @@
         </p:nvSpPr>
         <p:spPr>
           <a:xfrm>
-            <a:off x="640080" y="3200400"/>
-            <a:ext cx="7315200" cy="868680"/>
+            <a:off x="685800" y="3200400"/>
+            <a:ext cx="7315200" cy="841248"/>
           </a:xfrm>
           <a:prstGeom prst="rect">
             <a:avLst/>
@@ -6866,18 +6907,18 @@
           <a:p>
             <a:pPr algn="l" indent="0" marL="0">
               <a:lnSpc>
-                <a:spcPct val="112000"/>
+                <a:spcPct val="108000"/>
               </a:lnSpc>
               <a:buNone/>
             </a:pPr>
             <a:r>
-              <a:rPr lang="en-US" sz="3600" b="1" dirty="0">
+              <a:rPr lang="en-US" sz="3600" b="1" spc="-20" kern="0" dirty="0">
                 <a:solidFill>
                   <a:srgbClr val="FFFFFF"/>
                 </a:solidFill>
-                <a:latin typeface="Meiryo" pitchFamily="34" charset="0"/>
-                <a:ea typeface="Meiryo" pitchFamily="34" charset="-122"/>
-                <a:cs typeface="Meiryo" pitchFamily="34" charset="-120"/>
+                <a:latin typeface="Yu Gothic" pitchFamily="34" charset="0"/>
+                <a:ea typeface="Yu Gothic" pitchFamily="34" charset="-122"/>
+                <a:cs typeface="Yu Gothic" pitchFamily="34" charset="-120"/>
               </a:rPr>
               <a:t>下期の重点課題と打ち手</a:t>
             </a:r>
@@ -6893,7 +6934,7 @@
         </p:nvSpPr>
         <p:spPr>
           <a:xfrm>
-            <a:off x="640080" y="4434840"/>
+            <a:off x="685800" y="4434840"/>
             <a:ext cx="7315200" cy="548640"/>
           </a:xfrm>
           <a:prstGeom prst="rect">
@@ -6908,7 +6949,7 @@
           <a:p>
             <a:pPr algn="l" indent="0" marL="0">
               <a:lnSpc>
-                <a:spcPct val="130000"/>
+                <a:spcPct val="140000"/>
               </a:lnSpc>
               <a:buNone/>
             </a:pPr>
@@ -6917,9 +6958,9 @@
                 <a:solidFill>
                   <a:srgbClr val="AAB8C7"/>
                 </a:solidFill>
-                <a:latin typeface="Meiryo" pitchFamily="34" charset="0"/>
-                <a:ea typeface="Meiryo" pitchFamily="34" charset="-122"/>
-                <a:cs typeface="Meiryo" pitchFamily="34" charset="-120"/>
+                <a:latin typeface="Yu Gothic Medium" pitchFamily="34" charset="0"/>
+                <a:ea typeface="Yu Gothic Medium" pitchFamily="34" charset="-122"/>
+                <a:cs typeface="Yu Gothic Medium" pitchFamily="34" charset="-120"/>
               </a:rPr>
               <a:t>増収を維持しつつ、原価上昇をどう吸収するか</a:t>
             </a:r>
@@ -6967,7 +7008,7 @@
         </p:nvSpPr>
         <p:spPr>
           <a:xfrm>
-            <a:off x="640080" y="690372"/>
+            <a:off x="685800" y="736092"/>
             <a:ext cx="118872" cy="118872"/>
           </a:xfrm>
           <a:prstGeom prst="ellipse">
@@ -6987,7 +7028,7 @@
         </p:nvSpPr>
         <p:spPr>
           <a:xfrm>
-            <a:off x="877824" y="640080"/>
+            <a:off x="923544" y="685800"/>
             <a:ext cx="7315200" cy="274320"/>
           </a:xfrm>
           <a:prstGeom prst="rect">
@@ -7004,17 +7045,17 @@
               <a:buNone/>
             </a:pPr>
             <a:r>
-              <a:rPr lang="en-US" sz="1250" b="1" spc="100" kern="0" dirty="0">
+              <a:rPr lang="en-US" sz="1200" b="1" spc="150" kern="0" dirty="0">
                 <a:solidFill>
                   <a:srgbClr val="0E7C86"/>
                 </a:solidFill>
-                <a:latin typeface="Meiryo" pitchFamily="34" charset="0"/>
-                <a:ea typeface="Meiryo" pitchFamily="34" charset="-122"/>
-                <a:cs typeface="Meiryo" pitchFamily="34" charset="-120"/>
+                <a:latin typeface="Yu Gothic" pitchFamily="34" charset="0"/>
+                <a:ea typeface="Yu Gothic" pitchFamily="34" charset="-122"/>
+                <a:cs typeface="Yu Gothic" pitchFamily="34" charset="-120"/>
               </a:rPr>
               <a:t>下期の打ち手</a:t>
             </a:r>
-            <a:endParaRPr lang="en-US" sz="1250" dirty="0"/>
+            <a:endParaRPr lang="en-US" sz="1200" dirty="0"/>
           </a:p>
         </p:txBody>
       </p:sp>
@@ -7026,8 +7067,8 @@
         </p:nvSpPr>
         <p:spPr>
           <a:xfrm>
-            <a:off x="640080" y="1051560"/>
-            <a:ext cx="6400800" cy="868680"/>
+            <a:off x="685800" y="1051560"/>
+            <a:ext cx="6400800" cy="841248"/>
           </a:xfrm>
           <a:prstGeom prst="rect">
             <a:avLst/>
@@ -7041,22 +7082,22 @@
           <a:p>
             <a:pPr algn="l" indent="0" marL="0">
               <a:lnSpc>
-                <a:spcPct val="112000"/>
+                <a:spcPct val="108000"/>
               </a:lnSpc>
               <a:buNone/>
             </a:pPr>
             <a:r>
-              <a:rPr lang="en-US" sz="2800" b="1" dirty="0">
+              <a:rPr lang="en-US" sz="3000" b="1" spc="-20" kern="0" dirty="0">
                 <a:solidFill>
                   <a:srgbClr val="1B2735"/>
                 </a:solidFill>
-                <a:latin typeface="Meiryo" pitchFamily="34" charset="0"/>
-                <a:ea typeface="Meiryo" pitchFamily="34" charset="-122"/>
-                <a:cs typeface="Meiryo" pitchFamily="34" charset="-120"/>
+                <a:latin typeface="Yu Gothic" pitchFamily="34" charset="0"/>
+                <a:ea typeface="Yu Gothic" pitchFamily="34" charset="-122"/>
+                <a:cs typeface="Yu Gothic" pitchFamily="34" charset="-120"/>
               </a:rPr>
               <a:t>利益を守る、3つの打ち手</a:t>
             </a:r>
-            <a:endParaRPr lang="en-US" sz="2800" dirty="0"/>
+            <a:endParaRPr lang="en-US" sz="3000" dirty="0"/>
           </a:p>
         </p:txBody>
       </p:sp>
@@ -7068,8 +7109,8 @@
         </p:nvSpPr>
         <p:spPr>
           <a:xfrm>
-            <a:off x="640080" y="2286000"/>
-            <a:ext cx="4754880" cy="3291840"/>
+            <a:off x="685800" y="2331720"/>
+            <a:ext cx="4572000" cy="3291840"/>
           </a:xfrm>
           <a:prstGeom prst="rect">
             <a:avLst/>
@@ -7083,7 +7124,7 @@
           <a:p>
             <a:pPr algn="l" indent="0" marL="0">
               <a:lnSpc>
-                <a:spcPct val="145000"/>
+                <a:spcPct val="160000"/>
               </a:lnSpc>
               <a:buNone/>
             </a:pPr>
@@ -7092,9 +7133,9 @@
                 <a:solidFill>
                   <a:srgbClr val="566373"/>
                 </a:solidFill>
-                <a:latin typeface="Meiryo" pitchFamily="34" charset="0"/>
-                <a:ea typeface="Meiryo" pitchFamily="34" charset="-122"/>
-                <a:cs typeface="Meiryo" pitchFamily="34" charset="-120"/>
+                <a:latin typeface="Yu Gothic Medium" pitchFamily="34" charset="0"/>
+                <a:ea typeface="Yu Gothic Medium" pitchFamily="34" charset="-122"/>
+                <a:cs typeface="Yu Gothic Medium" pitchFamily="34" charset="-120"/>
               </a:rPr>
               <a:t>下期は増収基調を維持できる見込みですが、部材原価と人件費の上昇が利益率を押し下げるリスクがあります。利益を守るための打ち手を3つに絞りました。</a:t>
             </a:r>
@@ -7110,7 +7151,7 @@
         </p:nvSpPr>
         <p:spPr>
           <a:xfrm>
-            <a:off x="5897880" y="2240280"/>
+            <a:off x="5897880" y="2286000"/>
             <a:ext cx="420624" cy="420624"/>
           </a:xfrm>
           <a:prstGeom prst="ellipse">
@@ -7130,7 +7171,7 @@
         </p:nvSpPr>
         <p:spPr>
           <a:xfrm>
-            <a:off x="5897880" y="2240280"/>
+            <a:off x="5897880" y="2286000"/>
             <a:ext cx="420624" cy="420624"/>
           </a:xfrm>
           <a:prstGeom prst="rect">
@@ -7151,9 +7192,9 @@
                 <a:solidFill>
                   <a:srgbClr val="FFFFFF"/>
                 </a:solidFill>
-                <a:latin typeface="Meiryo" pitchFamily="34" charset="0"/>
-                <a:ea typeface="Meiryo" pitchFamily="34" charset="-122"/>
-                <a:cs typeface="Meiryo" pitchFamily="34" charset="-120"/>
+                <a:latin typeface="Yu Gothic" pitchFamily="34" charset="0"/>
+                <a:ea typeface="Yu Gothic" pitchFamily="34" charset="-122"/>
+                <a:cs typeface="Yu Gothic" pitchFamily="34" charset="-120"/>
               </a:rPr>
               <a:t>1</a:t>
             </a:r>
@@ -7169,8 +7210,8 @@
         </p:nvSpPr>
         <p:spPr>
           <a:xfrm>
-            <a:off x="6501384" y="2194560"/>
-            <a:ext cx="5050231" cy="365760"/>
+            <a:off x="6501384" y="2240280"/>
+            <a:ext cx="5004511" cy="365760"/>
           </a:xfrm>
           <a:prstGeom prst="rect">
             <a:avLst/>
@@ -7186,17 +7227,17 @@
               <a:buNone/>
             </a:pPr>
             <a:r>
-              <a:rPr lang="en-US" sz="1800" b="1" dirty="0">
+              <a:rPr lang="en-US" sz="1900" b="1" dirty="0">
                 <a:solidFill>
                   <a:srgbClr val="1B2735"/>
                 </a:solidFill>
-                <a:latin typeface="Meiryo" pitchFamily="34" charset="0"/>
-                <a:ea typeface="Meiryo" pitchFamily="34" charset="-122"/>
-                <a:cs typeface="Meiryo" pitchFamily="34" charset="-120"/>
+                <a:latin typeface="Yu Gothic" pitchFamily="34" charset="0"/>
+                <a:ea typeface="Yu Gothic" pitchFamily="34" charset="-122"/>
+                <a:cs typeface="Yu Gothic" pitchFamily="34" charset="-120"/>
               </a:rPr>
               <a:t>価格マネジメント</a:t>
             </a:r>
-            <a:endParaRPr lang="en-US" sz="1800" dirty="0"/>
+            <a:endParaRPr lang="en-US" sz="1900" dirty="0"/>
           </a:p>
         </p:txBody>
       </p:sp>
@@ -7208,8 +7249,8 @@
         </p:nvSpPr>
         <p:spPr>
           <a:xfrm>
-            <a:off x="6501384" y="2624328"/>
-            <a:ext cx="5050231" cy="640080"/>
+            <a:off x="6501384" y="2688336"/>
+            <a:ext cx="5004511" cy="640080"/>
           </a:xfrm>
           <a:prstGeom prst="rect">
             <a:avLst/>
@@ -7223,22 +7264,22 @@
           <a:p>
             <a:pPr algn="l" indent="0" marL="0">
               <a:lnSpc>
-                <a:spcPct val="130000"/>
+                <a:spcPct val="140000"/>
               </a:lnSpc>
               <a:buNone/>
             </a:pPr>
             <a:r>
-              <a:rPr lang="en-US" sz="1300" dirty="0">
+              <a:rPr lang="en-US" sz="1350" dirty="0">
                 <a:solidFill>
                   <a:srgbClr val="566373"/>
                 </a:solidFill>
-                <a:latin typeface="Meiryo" pitchFamily="34" charset="0"/>
-                <a:ea typeface="Meiryo" pitchFamily="34" charset="-122"/>
-                <a:cs typeface="Meiryo" pitchFamily="34" charset="-120"/>
+                <a:latin typeface="Yu Gothic Medium" pitchFamily="34" charset="0"/>
+                <a:ea typeface="Yu Gothic Medium" pitchFamily="34" charset="-122"/>
+                <a:cs typeface="Yu Gothic Medium" pitchFamily="34" charset="-120"/>
               </a:rPr>
               <a:t>原価連動の価格改定を継続し、改定の浸透状況を月次でモニタリングする</a:t>
             </a:r>
-            <a:endParaRPr lang="en-US" sz="1300" dirty="0"/>
+            <a:endParaRPr lang="en-US" sz="1350" dirty="0"/>
           </a:p>
         </p:txBody>
       </p:sp>
@@ -7250,7 +7291,7 @@
         </p:nvSpPr>
         <p:spPr>
           <a:xfrm>
-            <a:off x="5897880" y="3538728"/>
+            <a:off x="5897880" y="3621024"/>
             <a:ext cx="420624" cy="420624"/>
           </a:xfrm>
           <a:prstGeom prst="ellipse">
@@ -7270,7 +7311,7 @@
         </p:nvSpPr>
         <p:spPr>
           <a:xfrm>
-            <a:off x="5897880" y="3538728"/>
+            <a:off x="5897880" y="3621024"/>
             <a:ext cx="420624" cy="420624"/>
           </a:xfrm>
           <a:prstGeom prst="rect">
@@ -7291,9 +7332,9 @@
                 <a:solidFill>
                   <a:srgbClr val="FFFFFF"/>
                 </a:solidFill>
-                <a:latin typeface="Meiryo" pitchFamily="34" charset="0"/>
-                <a:ea typeface="Meiryo" pitchFamily="34" charset="-122"/>
-                <a:cs typeface="Meiryo" pitchFamily="34" charset="-120"/>
+                <a:latin typeface="Yu Gothic" pitchFamily="34" charset="0"/>
+                <a:ea typeface="Yu Gothic" pitchFamily="34" charset="-122"/>
+                <a:cs typeface="Yu Gothic" pitchFamily="34" charset="-120"/>
               </a:rPr>
               <a:t>2</a:t>
             </a:r>
@@ -7309,8 +7350,8 @@
         </p:nvSpPr>
         <p:spPr>
           <a:xfrm>
-            <a:off x="6501384" y="3493008"/>
-            <a:ext cx="5050231" cy="365760"/>
+            <a:off x="6501384" y="3575304"/>
+            <a:ext cx="5004511" cy="365760"/>
           </a:xfrm>
           <a:prstGeom prst="rect">
             <a:avLst/>
@@ -7326,17 +7367,17 @@
               <a:buNone/>
             </a:pPr>
             <a:r>
-              <a:rPr lang="en-US" sz="1800" b="1" dirty="0">
+              <a:rPr lang="en-US" sz="1900" b="1" dirty="0">
                 <a:solidFill>
                   <a:srgbClr val="1B2735"/>
                 </a:solidFill>
-                <a:latin typeface="Meiryo" pitchFamily="34" charset="0"/>
-                <a:ea typeface="Meiryo" pitchFamily="34" charset="-122"/>
-                <a:cs typeface="Meiryo" pitchFamily="34" charset="-120"/>
+                <a:latin typeface="Yu Gothic" pitchFamily="34" charset="0"/>
+                <a:ea typeface="Yu Gothic" pitchFamily="34" charset="-122"/>
+                <a:cs typeface="Yu Gothic" pitchFamily="34" charset="-120"/>
               </a:rPr>
               <a:t>調達改革</a:t>
             </a:r>
-            <a:endParaRPr lang="en-US" sz="1800" dirty="0"/>
+            <a:endParaRPr lang="en-US" sz="1900" dirty="0"/>
           </a:p>
         </p:txBody>
       </p:sp>
@@ -7348,8 +7389,8 @@
         </p:nvSpPr>
         <p:spPr>
           <a:xfrm>
-            <a:off x="6501384" y="3922776"/>
-            <a:ext cx="5050231" cy="640080"/>
+            <a:off x="6501384" y="4023360"/>
+            <a:ext cx="5004511" cy="640080"/>
           </a:xfrm>
           <a:prstGeom prst="rect">
             <a:avLst/>
@@ -7363,22 +7404,22 @@
           <a:p>
             <a:pPr algn="l" indent="0" marL="0">
               <a:lnSpc>
-                <a:spcPct val="130000"/>
+                <a:spcPct val="140000"/>
               </a:lnSpc>
               <a:buNone/>
             </a:pPr>
             <a:r>
-              <a:rPr lang="en-US" sz="1300" dirty="0">
+              <a:rPr lang="en-US" sz="1350" dirty="0">
                 <a:solidFill>
                   <a:srgbClr val="566373"/>
                 </a:solidFill>
-                <a:latin typeface="Meiryo" pitchFamily="34" charset="0"/>
-                <a:ea typeface="Meiryo" pitchFamily="34" charset="-122"/>
-                <a:cs typeface="Meiryo" pitchFamily="34" charset="-120"/>
+                <a:latin typeface="Yu Gothic Medium" pitchFamily="34" charset="0"/>
+                <a:ea typeface="Yu Gothic Medium" pitchFamily="34" charset="-122"/>
+                <a:cs typeface="Yu Gothic Medium" pitchFamily="34" charset="-120"/>
               </a:rPr>
               <a:t>主要部材の複社購買とVA/VEで、調達コストの上昇を一部吸収する</a:t>
             </a:r>
-            <a:endParaRPr lang="en-US" sz="1300" dirty="0"/>
+            <a:endParaRPr lang="en-US" sz="1350" dirty="0"/>
           </a:p>
         </p:txBody>
       </p:sp>
@@ -7390,7 +7431,7 @@
         </p:nvSpPr>
         <p:spPr>
           <a:xfrm>
-            <a:off x="5897880" y="4837176"/>
+            <a:off x="5897880" y="4956048"/>
             <a:ext cx="420624" cy="420624"/>
           </a:xfrm>
           <a:prstGeom prst="ellipse">
@@ -7410,7 +7451,7 @@
         </p:nvSpPr>
         <p:spPr>
           <a:xfrm>
-            <a:off x="5897880" y="4837176"/>
+            <a:off x="5897880" y="4956048"/>
             <a:ext cx="420624" cy="420624"/>
           </a:xfrm>
           <a:prstGeom prst="rect">
@@ -7431,9 +7472,9 @@
                 <a:solidFill>
                   <a:srgbClr val="FFFFFF"/>
                 </a:solidFill>
-                <a:latin typeface="Meiryo" pitchFamily="34" charset="0"/>
-                <a:ea typeface="Meiryo" pitchFamily="34" charset="-122"/>
-                <a:cs typeface="Meiryo" pitchFamily="34" charset="-120"/>
+                <a:latin typeface="Yu Gothic" pitchFamily="34" charset="0"/>
+                <a:ea typeface="Yu Gothic" pitchFamily="34" charset="-122"/>
+                <a:cs typeface="Yu Gothic" pitchFamily="34" charset="-120"/>
               </a:rPr>
               <a:t>3</a:t>
             </a:r>
@@ -7449,8 +7490,8 @@
         </p:nvSpPr>
         <p:spPr>
           <a:xfrm>
-            <a:off x="6501384" y="4791456"/>
-            <a:ext cx="5050231" cy="365760"/>
+            <a:off x="6501384" y="4910328"/>
+            <a:ext cx="5004511" cy="365760"/>
           </a:xfrm>
           <a:prstGeom prst="rect">
             <a:avLst/>
@@ -7466,17 +7507,17 @@
               <a:buNone/>
             </a:pPr>
             <a:r>
-              <a:rPr lang="en-US" sz="1800" b="1" dirty="0">
+              <a:rPr lang="en-US" sz="1900" b="1" dirty="0">
                 <a:solidFill>
                   <a:srgbClr val="1B2735"/>
                 </a:solidFill>
-                <a:latin typeface="Meiryo" pitchFamily="34" charset="0"/>
-                <a:ea typeface="Meiryo" pitchFamily="34" charset="-122"/>
-                <a:cs typeface="Meiryo" pitchFamily="34" charset="-120"/>
+                <a:latin typeface="Yu Gothic" pitchFamily="34" charset="0"/>
+                <a:ea typeface="Yu Gothic" pitchFamily="34" charset="-122"/>
+                <a:cs typeface="Yu Gothic" pitchFamily="34" charset="-120"/>
               </a:rPr>
               <a:t>固定費の規律</a:t>
             </a:r>
-            <a:endParaRPr lang="en-US" sz="1800" dirty="0"/>
+            <a:endParaRPr lang="en-US" sz="1900" dirty="0"/>
           </a:p>
         </p:txBody>
       </p:sp>
@@ -7488,8 +7529,8 @@
         </p:nvSpPr>
         <p:spPr>
           <a:xfrm>
-            <a:off x="6501384" y="5221224"/>
-            <a:ext cx="5050231" cy="640080"/>
+            <a:off x="6501384" y="5358384"/>
+            <a:ext cx="5004511" cy="640080"/>
           </a:xfrm>
           <a:prstGeom prst="rect">
             <a:avLst/>
@@ -7503,22 +7544,22 @@
           <a:p>
             <a:pPr algn="l" indent="0" marL="0">
               <a:lnSpc>
-                <a:spcPct val="130000"/>
+                <a:spcPct val="140000"/>
               </a:lnSpc>
               <a:buNone/>
             </a:pPr>
             <a:r>
-              <a:rPr lang="en-US" sz="1300" dirty="0">
+              <a:rPr lang="en-US" sz="1350" dirty="0">
                 <a:solidFill>
                   <a:srgbClr val="566373"/>
                 </a:solidFill>
-                <a:latin typeface="Meiryo" pitchFamily="34" charset="0"/>
-                <a:ea typeface="Meiryo" pitchFamily="34" charset="-122"/>
-                <a:cs typeface="Meiryo" pitchFamily="34" charset="-120"/>
+                <a:latin typeface="Yu Gothic Medium" pitchFamily="34" charset="0"/>
+                <a:ea typeface="Yu Gothic Medium" pitchFamily="34" charset="-122"/>
+                <a:cs typeface="Yu Gothic Medium" pitchFamily="34" charset="-120"/>
               </a:rPr>
               <a:t>採用は利益貢献部門に限定し、固定費の伸びを売上の伸びの範囲内に収める</a:t>
             </a:r>
-            <a:endParaRPr lang="en-US" sz="1300" dirty="0"/>
+            <a:endParaRPr lang="en-US" sz="1350" dirty="0"/>
           </a:p>
         </p:txBody>
       </p:sp>
@@ -7530,7 +7571,7 @@
         </p:nvSpPr>
         <p:spPr>
           <a:xfrm>
-            <a:off x="640080" y="6473952"/>
+            <a:off x="685800" y="6473952"/>
             <a:ext cx="2743200" cy="274320"/>
           </a:xfrm>
           <a:prstGeom prst="rect">
@@ -7547,17 +7588,17 @@
               <a:buNone/>
             </a:pPr>
             <a:r>
-              <a:rPr lang="en-US" sz="1100" dirty="0">
+              <a:rPr lang="en-US" sz="1200" dirty="0">
                 <a:solidFill>
                   <a:srgbClr val="8A98A6"/>
                 </a:solidFill>
-                <a:latin typeface="Meiryo" pitchFamily="34" charset="0"/>
-                <a:ea typeface="Meiryo" pitchFamily="34" charset="-122"/>
-                <a:cs typeface="Meiryo" pitchFamily="34" charset="-120"/>
+                <a:latin typeface="Yu Gothic" pitchFamily="34" charset="0"/>
+                <a:ea typeface="Yu Gothic" pitchFamily="34" charset="-122"/>
+                <a:cs typeface="Yu Gothic" pitchFamily="34" charset="-120"/>
               </a:rPr>
               <a:t>サンプル製造</a:t>
             </a:r>
-            <a:endParaRPr lang="en-US" sz="1100" dirty="0"/>
+            <a:endParaRPr lang="en-US" sz="1200" dirty="0"/>
           </a:p>
         </p:txBody>
       </p:sp>
@@ -7569,7 +7610,7 @@
         </p:nvSpPr>
         <p:spPr>
           <a:xfrm>
-            <a:off x="10637215" y="6473952"/>
+            <a:off x="10591495" y="6473952"/>
             <a:ext cx="914400" cy="274320"/>
           </a:xfrm>
           <a:prstGeom prst="rect">
@@ -7586,17 +7627,17 @@
               <a:buNone/>
             </a:pPr>
             <a:r>
-              <a:rPr lang="en-US" sz="1100" dirty="0">
+              <a:rPr lang="en-US" sz="1200" dirty="0">
                 <a:solidFill>
                   <a:srgbClr val="8A98A6"/>
                 </a:solidFill>
-                <a:latin typeface="Meiryo" pitchFamily="34" charset="0"/>
-                <a:ea typeface="Meiryo" pitchFamily="34" charset="-122"/>
-                <a:cs typeface="Meiryo" pitchFamily="34" charset="-120"/>
+                <a:latin typeface="Yu Gothic" pitchFamily="34" charset="0"/>
+                <a:ea typeface="Yu Gothic" pitchFamily="34" charset="-122"/>
+                <a:cs typeface="Yu Gothic" pitchFamily="34" charset="-120"/>
               </a:rPr>
               <a:t>9</a:t>
             </a:r>
-            <a:endParaRPr lang="en-US" sz="1100" dirty="0"/>
+            <a:endParaRPr lang="en-US" sz="1200" dirty="0"/>
           </a:p>
         </p:txBody>
       </p:sp>
